--- a/Motor_Scoring_Clean_Architecture.pptx
+++ b/Motor_Scoring_Clean_Architecture.pptx
@@ -1870,8 +1870,9 @@
             </a:endParaRPr>
           </a:p>
           <a:p>
-            <a:pPr marL="0" indent="0">
-              <a:buNone/>
+            <a:pPr marL="171450" indent="-171450">
+              <a:buFontTx/>
+              <a:buChar char="-"/>
             </a:pPr>
             <a:r>
               <a:rPr lang="en-US" sz="1200" dirty="0">
@@ -1881,7 +1882,31 @@
                 <a:latin typeface="Arial" pitchFamily="34" charset="0"/>
                 <a:cs typeface="Arial" pitchFamily="34" charset="-120"/>
               </a:rPr>
-              <a:t>- José Julca</a:t>
+              <a:t>José Julca</a:t>
+            </a:r>
+          </a:p>
+          <a:p>
+            <a:r>
+              <a:rPr lang="en-US" sz="1200" dirty="0">
+                <a:solidFill>
+                  <a:srgbClr val="6B84A3"/>
+                </a:solidFill>
+                <a:latin typeface="Arial" pitchFamily="34" charset="0"/>
+                <a:cs typeface="Arial" pitchFamily="34" charset="-120"/>
+              </a:rPr>
+              <a:t>-  José Huaman </a:t>
+            </a:r>
+          </a:p>
+          <a:p>
+            <a:r>
+              <a:rPr lang="en-US" sz="1200" dirty="0">
+                <a:solidFill>
+                  <a:srgbClr val="6B84A3"/>
+                </a:solidFill>
+                <a:latin typeface="Arial" pitchFamily="34" charset="0"/>
+                <a:cs typeface="Arial" pitchFamily="34" charset="-120"/>
+              </a:rPr>
+              <a:t>-  Jhonatan Barrientos</a:t>
             </a:r>
             <a:endParaRPr lang="en-US" sz="1200" dirty="0"/>
           </a:p>

--- a/Motor_Scoring_Clean_Architecture.pptx
+++ b/Motor_Scoring_Clean_Architecture.pptx
@@ -4,6 +4,9 @@
   <p:sldMasterIdLst>
     <p:sldMasterId id="2147483648" r:id="rId1"/>
   </p:sldMasterIdLst>
+  <p:notesMasterIdLst>
+    <p:notesMasterId r:id="rId14"/>
+  </p:notesMasterIdLst>
   <p:sldIdLst>
     <p:sldId id="256" r:id="rId2"/>
     <p:sldId id="257" r:id="rId3"/>
@@ -18,9 +21,6 @@
     <p:sldId id="266" r:id="rId12"/>
     <p:sldId id="267" r:id="rId13"/>
   </p:sldIdLst>
-  <p:notesMasterIdLst>
-    <p:notesMasterId r:id="rId14"/>
-  </p:notesMasterIdLst>
   <p:sldSz cx="12192000" cy="6858000"/>
   <p:notesSz cx="6858000" cy="12192000"/>
   <p:defaultTextStyle>
@@ -115,6 +115,11 @@
       </a:defRPr>
     </a:lvl9pPr>
   </p:defaultTextStyle>
+  <p:extLst>
+    <p:ext uri="{EFAFB233-063F-42B5-8137-9DF3F51BA10A}">
+      <p15:sldGuideLst xmlns:p15="http://schemas.microsoft.com/office/powerpoint/2012/main"/>
+    </p:ext>
+  </p:extLst>
 </p:presentation>
 </file>
 
@@ -140,234 +145,10 @@
           <a:chExt cx="0" cy="0"/>
         </a:xfrm>
       </p:grpSpPr>
-      <p:sp>
-        <p:nvSpPr>
-          <p:cNvPr id="2" name="Header Placeholder 1"/>
-          <p:cNvSpPr>
-            <a:spLocks noGrp="1"/>
-          </p:cNvSpPr>
-          <p:nvPr>
-            <p:ph type="hdr" sz="quarter"/>
-          </p:nvPr>
-        </p:nvSpPr>
-        <p:spPr>
-          <a:xfrm>
-            <a:off x="0" y="0"/>
-            <a:ext cx="2971800" cy="458788"/>
-          </a:xfrm>
-          <a:prstGeom prst="rect">
-            <a:avLst/>
-          </a:prstGeom>
-        </p:spPr>
-        <p:txBody>
-          <a:bodyPr vert="horz" lIns="91440" tIns="45720" rIns="91440" bIns="45720" rtlCol="0"/>
-          <a:lstStyle>
-            <a:lvl1pPr algn="l">
-              <a:defRPr sz="1200"/>
-            </a:lvl1pPr>
-          </a:lstStyle>
-          <a:p>
-            <a:endParaRPr lang="en-US"/>
-          </a:p>
-        </p:txBody>
-      </p:sp>
-      <p:sp>
-        <p:nvSpPr>
-          <p:cNvPr id="3" name="Date Placeholder 2"/>
-          <p:cNvSpPr>
-            <a:spLocks noGrp="1"/>
-          </p:cNvSpPr>
-          <p:nvPr>
-            <p:ph type="dt" idx="1"/>
-          </p:nvPr>
-        </p:nvSpPr>
-        <p:spPr>
-          <a:xfrm>
-            <a:off x="3884613" y="0"/>
-            <a:ext cx="2971800" cy="458788"/>
-          </a:xfrm>
-          <a:prstGeom prst="rect">
-            <a:avLst/>
-          </a:prstGeom>
-        </p:spPr>
-        <p:txBody>
-          <a:bodyPr vert="horz" lIns="91440" tIns="45720" rIns="91440" bIns="45720" rtlCol="0"/>
-          <a:lstStyle>
-            <a:lvl1pPr algn="r">
-              <a:defRPr sz="1200"/>
-            </a:lvl1pPr>
-          </a:lstStyle>
-          <a:p>
-            <a:fld id="{5282F153-3F37-0F45-9E97-73ACFA13230C}" type="datetimeFigureOut">
-              <a:rPr lang="en-US"/>
-              <a:t>7/23/19</a:t>
-            </a:fld>
-            <a:endParaRPr lang="en-US"/>
-          </a:p>
-        </p:txBody>
-      </p:sp>
-      <p:sp>
-        <p:nvSpPr>
-          <p:cNvPr id="4" name="Slide Image Placeholder 3"/>
-          <p:cNvSpPr>
-            <a:spLocks noGrp="1" noRot="1" noChangeAspect="1"/>
-          </p:cNvSpPr>
-          <p:nvPr>
-            <p:ph type="sldImg" idx="2"/>
-          </p:nvPr>
-        </p:nvSpPr>
-        <p:spPr>
-          <a:xfrm>
-            <a:off x="685800" y="1143000"/>
-            <a:ext cx="5486400" cy="3086100"/>
-          </a:xfrm>
-          <a:prstGeom prst="rect">
-            <a:avLst/>
-          </a:prstGeom>
-          <a:noFill/>
-          <a:ln w="12700">
-            <a:solidFill>
-              <a:prstClr val="black"/>
-            </a:solidFill>
-          </a:ln>
-        </p:spPr>
-        <p:txBody>
-          <a:bodyPr vert="horz" lIns="91440" tIns="45720" rIns="91440" bIns="45720" rtlCol="0" anchor="ctr"/>
-          <a:lstStyle/>
-          <a:p>
-            <a:endParaRPr lang="en-US"/>
-          </a:p>
-        </p:txBody>
-      </p:sp>
-      <p:sp>
-        <p:nvSpPr>
-          <p:cNvPr id="5" name="Notes Placeholder 4"/>
-          <p:cNvSpPr>
-            <a:spLocks noGrp="1"/>
-          </p:cNvSpPr>
-          <p:nvPr>
-            <p:ph type="body" sz="quarter" idx="3"/>
-          </p:nvPr>
-        </p:nvSpPr>
-        <p:spPr>
-          <a:xfrm>
-            <a:off x="685800" y="4400550"/>
-            <a:ext cx="5486400" cy="3600450"/>
-          </a:xfrm>
-          <a:prstGeom prst="rect">
-            <a:avLst/>
-          </a:prstGeom>
-        </p:spPr>
-        <p:txBody>
-          <a:bodyPr vert="horz" lIns="91440" tIns="45720" rIns="91440" bIns="45720" rtlCol="0"/>
-          <a:lstStyle/>
-          <a:p>
-            <a:pPr lvl="0"/>
-            <a:r>
-              <a:rPr lang="en-US"/>
-              <a:t>Click to edit Master text styles</a:t>
-            </a:r>
-          </a:p>
-          <a:p>
-            <a:pPr lvl="1"/>
-            <a:r>
-              <a:rPr lang="en-US"/>
-              <a:t>Second level</a:t>
-            </a:r>
-          </a:p>
-          <a:p>
-            <a:pPr lvl="2"/>
-            <a:r>
-              <a:rPr lang="en-US"/>
-              <a:t>Third level</a:t>
-            </a:r>
-          </a:p>
-          <a:p>
-            <a:pPr lvl="3"/>
-            <a:r>
-              <a:rPr lang="en-US"/>
-              <a:t>Fourth level</a:t>
-            </a:r>
-          </a:p>
-          <a:p>
-            <a:pPr lvl="4"/>
-            <a:r>
-              <a:rPr lang="en-US"/>
-              <a:t>Fifth level</a:t>
-            </a:r>
-          </a:p>
-        </p:txBody>
-      </p:sp>
-      <p:sp>
-        <p:nvSpPr>
-          <p:cNvPr id="6" name="Footer Placeholder 5"/>
-          <p:cNvSpPr>
-            <a:spLocks noGrp="1"/>
-          </p:cNvSpPr>
-          <p:nvPr>
-            <p:ph type="ftr" sz="quarter" idx="4"/>
-          </p:nvPr>
-        </p:nvSpPr>
-        <p:spPr>
-          <a:xfrm>
-            <a:off x="0" y="8685213"/>
-            <a:ext cx="2971800" cy="458787"/>
-          </a:xfrm>
-          <a:prstGeom prst="rect">
-            <a:avLst/>
-          </a:prstGeom>
-        </p:spPr>
-        <p:txBody>
-          <a:bodyPr vert="horz" lIns="91440" tIns="45720" rIns="91440" bIns="45720" rtlCol="0" anchor="b"/>
-          <a:lstStyle>
-            <a:lvl1pPr algn="l">
-              <a:defRPr sz="1200"/>
-            </a:lvl1pPr>
-          </a:lstStyle>
-          <a:p>
-            <a:endParaRPr lang="en-US"/>
-          </a:p>
-        </p:txBody>
-      </p:sp>
-      <p:sp>
-        <p:nvSpPr>
-          <p:cNvPr id="7" name="Slide Number Placeholder 6"/>
-          <p:cNvSpPr>
-            <a:spLocks noGrp="1"/>
-          </p:cNvSpPr>
-          <p:nvPr>
-            <p:ph type="sldNum" sz="quarter" idx="5"/>
-          </p:nvPr>
-        </p:nvSpPr>
-        <p:spPr>
-          <a:xfrm>
-            <a:off x="3884613" y="8685213"/>
-            <a:ext cx="2971800" cy="458787"/>
-          </a:xfrm>
-          <a:prstGeom prst="rect">
-            <a:avLst/>
-          </a:prstGeom>
-        </p:spPr>
-        <p:txBody>
-          <a:bodyPr vert="horz" lIns="91440" tIns="45720" rIns="91440" bIns="45720" rtlCol="0" anchor="b"/>
-          <a:lstStyle>
-            <a:lvl1pPr algn="r">
-              <a:defRPr sz="1200"/>
-            </a:lvl1pPr>
-          </a:lstStyle>
-          <a:p>
-            <a:fld id="{CE5E9CC1-C706-0F49-92D6-E571CC5EEA8F}" type="slidenum">
-              <a:rPr lang="en-US"/>
-              <a:t>‹#›</a:t>
-            </a:fld>
-            <a:endParaRPr lang="en-US"/>
-          </a:p>
-        </p:txBody>
-      </p:sp>
     </p:spTree>
     <p:extLst>
       <p:ext uri="{BB962C8B-B14F-4D97-AF65-F5344CB8AC3E}">
-        <p14:creationId xmlns:p14="http://schemas.microsoft.com/office/powerpoint/2010/main" val="1024086991"/>
+        <p14:creationId xmlns:p14="http://schemas.microsoft.com/office/powerpoint/2010/main" val="2398681493"/>
       </p:ext>
     </p:extLst>
   </p:cSld>
@@ -511,10 +292,6 @@
           <a:bodyPr/>
           <a:lstStyle/>
           <a:p>
-            <a:r>
-              <a:rPr lang="en-US" dirty="0"/>
-              <a:t/>
-            </a:r>
             <a:endParaRPr lang="en-US" dirty="0"/>
           </a:p>
         </p:txBody>
@@ -599,10 +376,6 @@
           <a:bodyPr/>
           <a:lstStyle/>
           <a:p>
-            <a:r>
-              <a:rPr lang="en-US" dirty="0"/>
-              <a:t/>
-            </a:r>
             <a:endParaRPr lang="en-US" dirty="0"/>
           </a:p>
         </p:txBody>
@@ -687,10 +460,6 @@
           <a:bodyPr/>
           <a:lstStyle/>
           <a:p>
-            <a:r>
-              <a:rPr lang="en-US" dirty="0"/>
-              <a:t/>
-            </a:r>
             <a:endParaRPr lang="en-US" dirty="0"/>
           </a:p>
         </p:txBody>
@@ -775,10 +544,6 @@
           <a:bodyPr/>
           <a:lstStyle/>
           <a:p>
-            <a:r>
-              <a:rPr lang="en-US" dirty="0"/>
-              <a:t/>
-            </a:r>
             <a:endParaRPr lang="en-US" dirty="0"/>
           </a:p>
         </p:txBody>
@@ -863,10 +628,6 @@
           <a:bodyPr/>
           <a:lstStyle/>
           <a:p>
-            <a:r>
-              <a:rPr lang="en-US" dirty="0"/>
-              <a:t/>
-            </a:r>
             <a:endParaRPr lang="en-US" dirty="0"/>
           </a:p>
         </p:txBody>
@@ -951,10 +712,6 @@
           <a:bodyPr/>
           <a:lstStyle/>
           <a:p>
-            <a:r>
-              <a:rPr lang="en-US" dirty="0"/>
-              <a:t/>
-            </a:r>
             <a:endParaRPr lang="en-US" dirty="0"/>
           </a:p>
         </p:txBody>
@@ -1039,10 +796,6 @@
           <a:bodyPr/>
           <a:lstStyle/>
           <a:p>
-            <a:r>
-              <a:rPr lang="en-US" dirty="0"/>
-              <a:t/>
-            </a:r>
             <a:endParaRPr lang="en-US" dirty="0"/>
           </a:p>
         </p:txBody>
@@ -1127,10 +880,6 @@
           <a:bodyPr/>
           <a:lstStyle/>
           <a:p>
-            <a:r>
-              <a:rPr lang="en-US" dirty="0"/>
-              <a:t/>
-            </a:r>
             <a:endParaRPr lang="en-US" dirty="0"/>
           </a:p>
         </p:txBody>
@@ -1215,10 +964,6 @@
           <a:bodyPr/>
           <a:lstStyle/>
           <a:p>
-            <a:r>
-              <a:rPr lang="en-US" dirty="0"/>
-              <a:t/>
-            </a:r>
             <a:endParaRPr lang="en-US" dirty="0"/>
           </a:p>
         </p:txBody>
@@ -1303,10 +1048,6 @@
           <a:bodyPr/>
           <a:lstStyle/>
           <a:p>
-            <a:r>
-              <a:rPr lang="en-US" dirty="0"/>
-              <a:t/>
-            </a:r>
             <a:endParaRPr lang="en-US" dirty="0"/>
           </a:p>
         </p:txBody>
@@ -1391,10 +1132,6 @@
           <a:bodyPr/>
           <a:lstStyle/>
           <a:p>
-            <a:r>
-              <a:rPr lang="en-US" dirty="0"/>
-              <a:t/>
-            </a:r>
             <a:endParaRPr lang="en-US" dirty="0"/>
           </a:p>
         </p:txBody>
@@ -1479,10 +1216,6 @@
           <a:bodyPr/>
           <a:lstStyle/>
           <a:p>
-            <a:r>
-              <a:rPr lang="en-US" dirty="0"/>
-              <a:t/>
-            </a:r>
             <a:endParaRPr lang="en-US" dirty="0"/>
           </a:p>
         </p:txBody>
@@ -1556,6 +1289,11 @@
 <file path=ppt/slideMasters/slideMaster1.xml><?xml version="1.0" encoding="utf-8"?>
 <p:sldMaster xmlns:a="http://schemas.openxmlformats.org/drawingml/2006/main" xmlns:r="http://schemas.openxmlformats.org/officeDocument/2006/relationships" xmlns:p="http://schemas.openxmlformats.org/presentationml/2006/main">
   <p:cSld>
+    <p:bg>
+      <p:bgRef idx="1001">
+        <a:schemeClr val="bg1"/>
+      </p:bgRef>
+    </p:bg>
     <p:spTree>
       <p:nvGrpSpPr>
         <p:cNvPr id="1" name=""/>
@@ -1838,6 +1576,7 @@
         <a:solidFill>
           <a:srgbClr val="0A1930"/>
         </a:solidFill>
+        <a:effectLst/>
       </p:bgPr>
     </p:bg>
     <p:spTree>
@@ -1873,6 +1612,13 @@
           </a:solidFill>
           <a:ln/>
         </p:spPr>
+        <p:txBody>
+          <a:bodyPr/>
+          <a:lstStyle/>
+          <a:p>
+            <a:endParaRPr lang="es-PE"/>
+          </a:p>
+        </p:txBody>
       </p:sp>
       <p:sp>
         <p:nvSpPr>
@@ -1897,6 +1643,13 @@
             <a:prstDash val="solid"/>
           </a:ln>
         </p:spPr>
+        <p:txBody>
+          <a:bodyPr/>
+          <a:lstStyle/>
+          <a:p>
+            <a:endParaRPr lang="es-PE"/>
+          </a:p>
+        </p:txBody>
       </p:sp>
       <p:sp>
         <p:nvSpPr>
@@ -1921,6 +1674,13 @@
             <a:prstDash val="solid"/>
           </a:ln>
         </p:spPr>
+        <p:txBody>
+          <a:bodyPr/>
+          <a:lstStyle/>
+          <a:p>
+            <a:endParaRPr lang="es-PE"/>
+          </a:p>
+        </p:txBody>
       </p:sp>
       <p:sp>
         <p:nvSpPr>
@@ -1945,6 +1705,13 @@
             <a:prstDash val="solid"/>
           </a:ln>
         </p:spPr>
+        <p:txBody>
+          <a:bodyPr/>
+          <a:lstStyle/>
+          <a:p>
+            <a:endParaRPr lang="es-PE"/>
+          </a:p>
+        </p:txBody>
       </p:sp>
       <p:sp>
         <p:nvSpPr>
@@ -1969,6 +1736,13 @@
             <a:prstDash val="solid"/>
           </a:ln>
         </p:spPr>
+        <p:txBody>
+          <a:bodyPr/>
+          <a:lstStyle/>
+          <a:p>
+            <a:endParaRPr lang="es-PE"/>
+          </a:p>
+        </p:txBody>
       </p:sp>
       <p:sp>
         <p:nvSpPr>
@@ -1991,11 +1765,11 @@
           <a:bodyPr wrap="square" lIns="0" tIns="0" rIns="0" bIns="0" rtlCol="0" anchor="ctr"/>
           <a:lstStyle/>
           <a:p>
-            <a:pPr indent="0" marL="0">
-              <a:buNone/>
-            </a:pPr>
-            <a:r>
-              <a:rPr lang="en-US" sz="1400" b="1" spc="300" kern="0" dirty="0">
+            <a:pPr marL="0" indent="0">
+              <a:buNone/>
+            </a:pPr>
+            <a:r>
+              <a:rPr lang="en-US" sz="1400" b="1" kern="0" spc="300" dirty="0">
                 <a:solidFill>
                   <a:srgbClr val="4FD1C5"/>
                 </a:solidFill>
@@ -2030,7 +1804,7 @@
           <a:bodyPr wrap="square" lIns="0" tIns="0" rIns="0" bIns="0" rtlCol="0" anchor="ctr"/>
           <a:lstStyle/>
           <a:p>
-            <a:pPr indent="0" marL="0">
+            <a:pPr marL="0" indent="0">
               <a:buNone/>
             </a:pPr>
             <a:r>
@@ -2069,7 +1843,7 @@
           <a:bodyPr wrap="square" lIns="0" tIns="0" rIns="0" bIns="0" rtlCol="0" anchor="ctr"/>
           <a:lstStyle/>
           <a:p>
-            <a:pPr indent="0" marL="0">
+            <a:pPr marL="0" indent="0">
               <a:buNone/>
             </a:pPr>
             <a:r>
@@ -2108,7 +1882,7 @@
           <a:bodyPr wrap="square" lIns="0" tIns="0" rIns="0" bIns="0" rtlCol="0" anchor="ctr"/>
           <a:lstStyle/>
           <a:p>
-            <a:pPr indent="0" marL="0">
+            <a:pPr marL="0" indent="0">
               <a:buNone/>
             </a:pPr>
             <a:r>
@@ -2121,6 +1895,107 @@
                 <a:cs typeface="Arial" pitchFamily="34" charset="-120"/>
               </a:rPr>
               <a:t>Java 21  ·  Spring Boot  ·  H2/JPA ↔ MongoDB</a:t>
+            </a:r>
+            <a:endParaRPr lang="en-US" sz="1200" dirty="0"/>
+          </a:p>
+        </p:txBody>
+      </p:sp>
+      <p:sp>
+        <p:nvSpPr>
+          <p:cNvPr id="12" name="Text 8">
+            <a:extLst>
+              <a:ext uri="{FF2B5EF4-FFF2-40B4-BE49-F238E27FC236}">
+                <a16:creationId xmlns:a16="http://schemas.microsoft.com/office/drawing/2014/main" id="{9C555783-8B0F-7ADF-869B-158DA3755ADB}"/>
+              </a:ext>
+            </a:extLst>
+          </p:cNvPr>
+          <p:cNvSpPr/>
+          <p:nvPr/>
+        </p:nvSpPr>
+        <p:spPr>
+          <a:xfrm>
+            <a:off x="579120" y="4114800"/>
+            <a:ext cx="4950412" cy="868680"/>
+          </a:xfrm>
+          <a:prstGeom prst="rect">
+            <a:avLst/>
+          </a:prstGeom>
+          <a:noFill/>
+          <a:ln/>
+        </p:spPr>
+        <p:txBody>
+          <a:bodyPr wrap="square" lIns="0" tIns="0" rIns="0" bIns="0" rtlCol="0" anchor="ctr"/>
+          <a:lstStyle/>
+          <a:p>
+            <a:pPr marL="0" indent="0">
+              <a:buNone/>
+            </a:pPr>
+            <a:r>
+              <a:rPr lang="en-US" sz="1200" dirty="0">
+                <a:solidFill>
+                  <a:srgbClr val="6B84A3"/>
+                </a:solidFill>
+                <a:latin typeface="Arial" pitchFamily="34" charset="0"/>
+                <a:cs typeface="Arial" pitchFamily="34" charset="-120"/>
+              </a:rPr>
+              <a:t>Integrantes:</a:t>
+            </a:r>
+          </a:p>
+          <a:p>
+            <a:pPr marL="0" indent="0">
+              <a:buNone/>
+            </a:pPr>
+            <a:endParaRPr lang="en-US" sz="1200" dirty="0">
+              <a:solidFill>
+                <a:srgbClr val="6B84A3"/>
+              </a:solidFill>
+              <a:latin typeface="Arial" pitchFamily="34" charset="0"/>
+              <a:cs typeface="Arial" pitchFamily="34" charset="-120"/>
+            </a:endParaRPr>
+          </a:p>
+          <a:p>
+            <a:pPr marL="0" indent="0">
+              <a:buNone/>
+            </a:pPr>
+            <a:r>
+              <a:rPr lang="en-US" sz="1200" dirty="0">
+                <a:solidFill>
+                  <a:srgbClr val="6B84A3"/>
+                </a:solidFill>
+                <a:latin typeface="Arial" pitchFamily="34" charset="0"/>
+                <a:cs typeface="Arial" pitchFamily="34" charset="-120"/>
+              </a:rPr>
+              <a:t>- José Julca</a:t>
+            </a:r>
+          </a:p>
+          <a:p>
+            <a:pPr marL="0" indent="0">
+              <a:buNone/>
+            </a:pPr>
+            <a:r>
+              <a:rPr lang="en-US" sz="1200" dirty="0">
+                <a:solidFill>
+                  <a:srgbClr val="6B84A3"/>
+                </a:solidFill>
+                <a:latin typeface="Arial" pitchFamily="34" charset="0"/>
+                <a:cs typeface="Arial" pitchFamily="34" charset="-120"/>
+              </a:rPr>
+              <a:t>- Jose Huaman</a:t>
+            </a:r>
+          </a:p>
+          <a:p>
+            <a:pPr marL="0" indent="0">
+              <a:buNone/>
+            </a:pPr>
+            <a:r>
+              <a:rPr lang="en-US" sz="1200" dirty="0">
+                <a:solidFill>
+                  <a:srgbClr val="6B84A3"/>
+                </a:solidFill>
+                <a:latin typeface="Arial" pitchFamily="34" charset="0"/>
+                <a:cs typeface="Arial" pitchFamily="34" charset="-120"/>
+              </a:rPr>
+              <a:t>- Jhonatan Barrientos</a:t>
             </a:r>
             <a:endParaRPr lang="en-US" sz="1200" dirty="0"/>
           </a:p>
@@ -2142,6 +2017,7 @@
         <a:solidFill>
           <a:srgbClr val="0A1930"/>
         </a:solidFill>
+        <a:effectLst/>
       </p:bgPr>
     </p:bg>
     <p:spTree>
@@ -2179,11 +2055,11 @@
           <a:bodyPr wrap="square" lIns="0" tIns="0" rIns="0" bIns="0" rtlCol="0" anchor="ctr"/>
           <a:lstStyle/>
           <a:p>
-            <a:pPr indent="0" marL="0">
-              <a:buNone/>
-            </a:pPr>
-            <a:r>
-              <a:rPr lang="en-US" sz="1200" b="1" spc="200" kern="0" dirty="0">
+            <a:pPr marL="0" indent="0">
+              <a:buNone/>
+            </a:pPr>
+            <a:r>
+              <a:rPr lang="en-US" sz="1200" b="1" kern="0" spc="200" dirty="0">
                 <a:solidFill>
                   <a:srgbClr val="4FD1C5"/>
                 </a:solidFill>
@@ -2218,7 +2094,7 @@
           <a:bodyPr wrap="square" lIns="0" tIns="0" rIns="0" bIns="0" rtlCol="0" anchor="ctr"/>
           <a:lstStyle/>
           <a:p>
-            <a:pPr indent="0" marL="0">
+            <a:pPr marL="0" indent="0">
               <a:buNone/>
             </a:pPr>
             <a:r>
@@ -2262,6 +2138,13 @@
             <a:prstDash val="solid"/>
           </a:ln>
         </p:spPr>
+        <p:txBody>
+          <a:bodyPr/>
+          <a:lstStyle/>
+          <a:p>
+            <a:endParaRPr lang="es-PE"/>
+          </a:p>
+        </p:txBody>
       </p:sp>
       <p:sp>
         <p:nvSpPr>
@@ -2284,7 +2167,7 @@
           <a:bodyPr wrap="square" lIns="0" tIns="0" rIns="0" bIns="0" rtlCol="0" anchor="ctr"/>
           <a:lstStyle/>
           <a:p>
-            <a:pPr indent="0" marL="0">
+            <a:pPr marL="0" indent="0">
               <a:buNone/>
             </a:pPr>
             <a:r>
@@ -2323,7 +2206,7 @@
           <a:bodyPr wrap="square" lIns="0" tIns="0" rIns="0" bIns="0" rtlCol="0" anchor="ctr"/>
           <a:lstStyle/>
           <a:p>
-            <a:pPr indent="0" marL="0">
+            <a:pPr marL="0" indent="0">
               <a:buNone/>
             </a:pPr>
             <a:r>
@@ -2362,7 +2245,7 @@
           <a:bodyPr wrap="square" lIns="0" tIns="0" rIns="0" bIns="0" rtlCol="0" anchor="ctr"/>
           <a:lstStyle/>
           <a:p>
-            <a:pPr indent="0" marL="0">
+            <a:pPr marL="0" indent="0">
               <a:buNone/>
             </a:pPr>
             <a:r>
@@ -2401,7 +2284,7 @@
           <a:bodyPr wrap="square" lIns="0" tIns="0" rIns="0" bIns="0" rtlCol="0" anchor="ctr"/>
           <a:lstStyle/>
           <a:p>
-            <a:pPr indent="0" marL="0">
+            <a:pPr marL="0" indent="0">
               <a:buNone/>
             </a:pPr>
             <a:r>
@@ -2440,7 +2323,7 @@
           <a:bodyPr wrap="square" lIns="0" tIns="0" rIns="0" bIns="0" rtlCol="0" anchor="ctr"/>
           <a:lstStyle/>
           <a:p>
-            <a:pPr indent="0" marL="0">
+            <a:pPr marL="0" indent="0">
               <a:buNone/>
             </a:pPr>
             <a:r>
@@ -2479,7 +2362,7 @@
           <a:bodyPr wrap="square" lIns="0" tIns="0" rIns="0" bIns="0" rtlCol="0" anchor="ctr"/>
           <a:lstStyle/>
           <a:p>
-            <a:pPr indent="0" marL="0">
+            <a:pPr marL="0" indent="0">
               <a:buNone/>
             </a:pPr>
             <a:r>
@@ -2518,7 +2401,7 @@
           <a:bodyPr wrap="square" lIns="0" tIns="0" rIns="0" bIns="0" rtlCol="0" anchor="ctr"/>
           <a:lstStyle/>
           <a:p>
-            <a:pPr indent="0" marL="0">
+            <a:pPr marL="0" indent="0">
               <a:buNone/>
             </a:pPr>
             <a:r>
@@ -2557,7 +2440,7 @@
           <a:bodyPr wrap="square" lIns="0" tIns="0" rIns="0" bIns="0" rtlCol="0" anchor="ctr"/>
           <a:lstStyle/>
           <a:p>
-            <a:pPr indent="0" marL="0">
+            <a:pPr marL="0" indent="0">
               <a:buNone/>
             </a:pPr>
             <a:r>
@@ -2596,7 +2479,7 @@
           <a:bodyPr wrap="square" lIns="0" tIns="0" rIns="0" bIns="0" rtlCol="0" anchor="ctr"/>
           <a:lstStyle/>
           <a:p>
-            <a:pPr indent="0" marL="0">
+            <a:pPr marL="0" indent="0">
               <a:buNone/>
             </a:pPr>
             <a:r>
@@ -2635,7 +2518,7 @@
           <a:bodyPr wrap="square" lIns="0" tIns="0" rIns="0" bIns="0" rtlCol="0" anchor="ctr"/>
           <a:lstStyle/>
           <a:p>
-            <a:pPr indent="0" marL="0">
+            <a:pPr marL="0" indent="0">
               <a:buNone/>
             </a:pPr>
             <a:r>
@@ -2674,7 +2557,7 @@
           <a:bodyPr wrap="square" lIns="0" tIns="0" rIns="0" bIns="0" rtlCol="0" anchor="ctr"/>
           <a:lstStyle/>
           <a:p>
-            <a:pPr indent="0" marL="0">
+            <a:pPr marL="0" indent="0">
               <a:buNone/>
             </a:pPr>
             <a:r>
@@ -2713,7 +2596,7 @@
           <a:bodyPr wrap="square" lIns="0" tIns="0" rIns="0" bIns="0" rtlCol="0" anchor="ctr"/>
           <a:lstStyle/>
           <a:p>
-            <a:pPr indent="0" marL="0">
+            <a:pPr marL="0" indent="0">
               <a:buNone/>
             </a:pPr>
             <a:r>
@@ -2752,7 +2635,7 @@
           <a:bodyPr wrap="square" lIns="0" tIns="0" rIns="0" bIns="0" rtlCol="0" anchor="ctr"/>
           <a:lstStyle/>
           <a:p>
-            <a:pPr indent="0" marL="0">
+            <a:pPr marL="0" indent="0">
               <a:buNone/>
             </a:pPr>
             <a:r>
@@ -2791,7 +2674,7 @@
           <a:bodyPr wrap="square" lIns="0" tIns="0" rIns="0" bIns="0" rtlCol="0" anchor="ctr"/>
           <a:lstStyle/>
           <a:p>
-            <a:pPr indent="0" marL="0">
+            <a:pPr marL="0" indent="0">
               <a:buNone/>
             </a:pPr>
             <a:r>
@@ -2830,7 +2713,7 @@
           <a:bodyPr wrap="square" lIns="0" tIns="0" rIns="0" bIns="0" rtlCol="0" anchor="ctr"/>
           <a:lstStyle/>
           <a:p>
-            <a:pPr indent="0" marL="0">
+            <a:pPr marL="0" indent="0">
               <a:buNone/>
             </a:pPr>
             <a:r>
@@ -2869,6 +2752,13 @@
           </a:solidFill>
           <a:ln/>
         </p:spPr>
+        <p:txBody>
+          <a:bodyPr/>
+          <a:lstStyle/>
+          <a:p>
+            <a:endParaRPr lang="es-PE"/>
+          </a:p>
+        </p:txBody>
       </p:sp>
       <p:sp>
         <p:nvSpPr>
@@ -2891,11 +2781,11 @@
           <a:bodyPr wrap="square" lIns="0" tIns="0" rIns="0" bIns="0" rtlCol="0" anchor="ctr"/>
           <a:lstStyle/>
           <a:p>
-            <a:pPr indent="0" marL="0">
-              <a:buNone/>
-            </a:pPr>
-            <a:r>
-              <a:rPr lang="en-US" sz="1100" b="1" spc="150" kern="0" dirty="0">
+            <a:pPr marL="0" indent="0">
+              <a:buNone/>
+            </a:pPr>
+            <a:r>
+              <a:rPr lang="en-US" sz="1100" b="1" kern="0" spc="150" dirty="0">
                 <a:solidFill>
                   <a:srgbClr val="4FD1C5"/>
                 </a:solidFill>
@@ -2930,7 +2820,7 @@
           <a:bodyPr wrap="square" lIns="0" tIns="0" rIns="0" bIns="0" rtlCol="0" anchor="ctr"/>
           <a:lstStyle/>
           <a:p>
-            <a:pPr indent="0" marL="0">
+            <a:pPr marL="0" indent="0">
               <a:buNone/>
             </a:pPr>
             <a:r>
@@ -2969,7 +2859,7 @@
           <a:bodyPr wrap="square" lIns="0" tIns="0" rIns="0" bIns="0" rtlCol="0" anchor="ctr"/>
           <a:lstStyle/>
           <a:p>
-            <a:pPr indent="0" marL="0">
+            <a:pPr marL="0" indent="0">
               <a:lnSpc>
                 <a:spcPct val="115000"/>
               </a:lnSpc>
@@ -3011,7 +2901,7 @@
           <a:bodyPr wrap="square" lIns="0" tIns="0" rIns="0" bIns="0" rtlCol="0" anchor="ctr"/>
           <a:lstStyle/>
           <a:p>
-            <a:pPr indent="0" marL="0">
+            <a:pPr marL="0" indent="0">
               <a:buNone/>
             </a:pPr>
             <a:r>
@@ -3050,7 +2940,7 @@
           <a:bodyPr wrap="square" lIns="0" tIns="0" rIns="0" bIns="0" rtlCol="0" anchor="ctr"/>
           <a:lstStyle/>
           <a:p>
-            <a:pPr indent="0" marL="0">
+            <a:pPr marL="0" indent="0">
               <a:lnSpc>
                 <a:spcPct val="115000"/>
               </a:lnSpc>
@@ -3092,7 +2982,7 @@
           <a:bodyPr wrap="square" lIns="0" tIns="0" rIns="0" bIns="0" rtlCol="0" anchor="ctr"/>
           <a:lstStyle/>
           <a:p>
-            <a:pPr indent="0" marL="0">
+            <a:pPr marL="0" indent="0">
               <a:buNone/>
             </a:pPr>
             <a:r>
@@ -3131,7 +3021,7 @@
           <a:bodyPr wrap="square" lIns="0" tIns="0" rIns="0" bIns="0" rtlCol="0" anchor="ctr"/>
           <a:lstStyle/>
           <a:p>
-            <a:pPr indent="0" marL="0">
+            <a:pPr marL="0" indent="0">
               <a:lnSpc>
                 <a:spcPct val="115000"/>
               </a:lnSpc>
@@ -3173,7 +3063,7 @@
           <a:bodyPr wrap="square" lIns="0" tIns="0" rIns="0" bIns="0" rtlCol="0" anchor="ctr"/>
           <a:lstStyle/>
           <a:p>
-            <a:pPr indent="0" marL="0">
+            <a:pPr marL="0" indent="0">
               <a:buNone/>
             </a:pPr>
             <a:r>
@@ -3212,7 +3102,7 @@
           <a:bodyPr wrap="square" lIns="0" tIns="0" rIns="0" bIns="0" rtlCol="0" anchor="ctr"/>
           <a:lstStyle/>
           <a:p>
-            <a:pPr indent="0" marL="0">
+            <a:pPr marL="0" indent="0">
               <a:lnSpc>
                 <a:spcPct val="115000"/>
               </a:lnSpc>
@@ -3254,7 +3144,7 @@
           <a:bodyPr wrap="square" lIns="0" tIns="0" rIns="0" bIns="0" rtlCol="0" anchor="ctr"/>
           <a:lstStyle/>
           <a:p>
-            <a:pPr algn="r" indent="0" marL="0">
+            <a:pPr marL="0" indent="0" algn="r">
               <a:buNone/>
             </a:pPr>
             <a:r>
@@ -3288,6 +3178,7 @@
         <a:solidFill>
           <a:srgbClr val="0A1930"/>
         </a:solidFill>
+        <a:effectLst/>
       </p:bgPr>
     </p:bg>
     <p:spTree>
@@ -3325,11 +3216,11 @@
           <a:bodyPr wrap="square" lIns="0" tIns="0" rIns="0" bIns="0" rtlCol="0" anchor="ctr"/>
           <a:lstStyle/>
           <a:p>
-            <a:pPr indent="0" marL="0">
-              <a:buNone/>
-            </a:pPr>
-            <a:r>
-              <a:rPr lang="en-US" sz="1200" b="1" spc="200" kern="0" dirty="0">
+            <a:pPr marL="0" indent="0">
+              <a:buNone/>
+            </a:pPr>
+            <a:r>
+              <a:rPr lang="en-US" sz="1200" b="1" kern="0" spc="200" dirty="0">
                 <a:solidFill>
                   <a:srgbClr val="4FD1C5"/>
                 </a:solidFill>
@@ -3364,7 +3255,7 @@
           <a:bodyPr wrap="square" lIns="0" tIns="0" rIns="0" bIns="0" rtlCol="0" anchor="ctr"/>
           <a:lstStyle/>
           <a:p>
-            <a:pPr indent="0" marL="0">
+            <a:pPr marL="0" indent="0">
               <a:buNone/>
             </a:pPr>
             <a:r>
@@ -3403,6 +3294,13 @@
           </a:solidFill>
           <a:ln/>
         </p:spPr>
+        <p:txBody>
+          <a:bodyPr/>
+          <a:lstStyle/>
+          <a:p>
+            <a:endParaRPr lang="es-PE"/>
+          </a:p>
+        </p:txBody>
       </p:sp>
       <p:sp>
         <p:nvSpPr>
@@ -3427,6 +3325,13 @@
           </a:solidFill>
           <a:ln/>
         </p:spPr>
+        <p:txBody>
+          <a:bodyPr/>
+          <a:lstStyle/>
+          <a:p>
+            <a:endParaRPr lang="es-PE"/>
+          </a:p>
+        </p:txBody>
       </p:sp>
       <p:sp>
         <p:nvSpPr>
@@ -3449,7 +3354,7 @@
           <a:bodyPr wrap="square" lIns="0" tIns="0" rIns="0" bIns="0" rtlCol="0" anchor="ctr"/>
           <a:lstStyle/>
           <a:p>
-            <a:pPr algn="ctr" indent="0" marL="0">
+            <a:pPr marL="0" indent="0" algn="ctr">
               <a:buNone/>
             </a:pPr>
             <a:r>
@@ -3488,7 +3393,7 @@
           <a:bodyPr wrap="square" lIns="0" tIns="0" rIns="0" bIns="0" rtlCol="0" anchor="ctr"/>
           <a:lstStyle/>
           <a:p>
-            <a:pPr indent="0" marL="0">
+            <a:pPr marL="0" indent="0">
               <a:lnSpc>
                 <a:spcPct val="120000"/>
               </a:lnSpc>
@@ -3530,6 +3435,13 @@
           </a:solidFill>
           <a:ln/>
         </p:spPr>
+        <p:txBody>
+          <a:bodyPr/>
+          <a:lstStyle/>
+          <a:p>
+            <a:endParaRPr lang="es-PE"/>
+          </a:p>
+        </p:txBody>
       </p:sp>
       <p:sp>
         <p:nvSpPr>
@@ -3554,6 +3466,13 @@
           </a:solidFill>
           <a:ln/>
         </p:spPr>
+        <p:txBody>
+          <a:bodyPr/>
+          <a:lstStyle/>
+          <a:p>
+            <a:endParaRPr lang="es-PE"/>
+          </a:p>
+        </p:txBody>
       </p:sp>
       <p:sp>
         <p:nvSpPr>
@@ -3576,7 +3495,7 @@
           <a:bodyPr wrap="square" lIns="0" tIns="0" rIns="0" bIns="0" rtlCol="0" anchor="ctr"/>
           <a:lstStyle/>
           <a:p>
-            <a:pPr algn="ctr" indent="0" marL="0">
+            <a:pPr marL="0" indent="0" algn="ctr">
               <a:buNone/>
             </a:pPr>
             <a:r>
@@ -3615,7 +3534,7 @@
           <a:bodyPr wrap="square" lIns="0" tIns="0" rIns="0" bIns="0" rtlCol="0" anchor="ctr"/>
           <a:lstStyle/>
           <a:p>
-            <a:pPr indent="0" marL="0">
+            <a:pPr marL="0" indent="0">
               <a:lnSpc>
                 <a:spcPct val="120000"/>
               </a:lnSpc>
@@ -3657,6 +3576,13 @@
           </a:solidFill>
           <a:ln/>
         </p:spPr>
+        <p:txBody>
+          <a:bodyPr/>
+          <a:lstStyle/>
+          <a:p>
+            <a:endParaRPr lang="es-PE"/>
+          </a:p>
+        </p:txBody>
       </p:sp>
       <p:sp>
         <p:nvSpPr>
@@ -3681,6 +3607,13 @@
           </a:solidFill>
           <a:ln/>
         </p:spPr>
+        <p:txBody>
+          <a:bodyPr/>
+          <a:lstStyle/>
+          <a:p>
+            <a:endParaRPr lang="es-PE"/>
+          </a:p>
+        </p:txBody>
       </p:sp>
       <p:sp>
         <p:nvSpPr>
@@ -3703,7 +3636,7 @@
           <a:bodyPr wrap="square" lIns="0" tIns="0" rIns="0" bIns="0" rtlCol="0" anchor="ctr"/>
           <a:lstStyle/>
           <a:p>
-            <a:pPr algn="ctr" indent="0" marL="0">
+            <a:pPr marL="0" indent="0" algn="ctr">
               <a:buNone/>
             </a:pPr>
             <a:r>
@@ -3742,7 +3675,7 @@
           <a:bodyPr wrap="square" lIns="0" tIns="0" rIns="0" bIns="0" rtlCol="0" anchor="ctr"/>
           <a:lstStyle/>
           <a:p>
-            <a:pPr indent="0" marL="0">
+            <a:pPr marL="0" indent="0">
               <a:lnSpc>
                 <a:spcPct val="120000"/>
               </a:lnSpc>
@@ -3791,6 +3724,13 @@
             <a:prstDash val="solid"/>
           </a:ln>
         </p:spPr>
+        <p:txBody>
+          <a:bodyPr/>
+          <a:lstStyle/>
+          <a:p>
+            <a:endParaRPr lang="es-PE"/>
+          </a:p>
+        </p:txBody>
       </p:sp>
       <p:sp>
         <p:nvSpPr>
@@ -3813,7 +3753,7 @@
           <a:bodyPr wrap="square" lIns="0" tIns="0" rIns="0" bIns="0" rtlCol="0" anchor="ctr"/>
           <a:lstStyle/>
           <a:p>
-            <a:pPr indent="0" marL="0">
+            <a:pPr marL="0" indent="0">
               <a:buNone/>
             </a:pPr>
             <a:r>
@@ -3852,7 +3792,7 @@
           <a:bodyPr wrap="square" lIns="0" tIns="0" rIns="0" bIns="0" rtlCol="0" anchor="ctr"/>
           <a:lstStyle/>
           <a:p>
-            <a:pPr indent="0" marL="0">
+            <a:pPr marL="0" indent="0">
               <a:lnSpc>
                 <a:spcPct val="120000"/>
               </a:lnSpc>
@@ -3894,7 +3834,7 @@
           <a:bodyPr wrap="square" lIns="0" tIns="0" rIns="0" bIns="0" rtlCol="0" anchor="ctr"/>
           <a:lstStyle/>
           <a:p>
-            <a:pPr algn="r" indent="0" marL="0">
+            <a:pPr marL="0" indent="0" algn="r">
               <a:buNone/>
             </a:pPr>
             <a:r>
@@ -3928,6 +3868,7 @@
         <a:solidFill>
           <a:srgbClr val="0A1930"/>
         </a:solidFill>
+        <a:effectLst/>
       </p:bgPr>
     </p:bg>
     <p:spTree>
@@ -3963,6 +3904,13 @@
           </a:solidFill>
           <a:ln/>
         </p:spPr>
+        <p:txBody>
+          <a:bodyPr/>
+          <a:lstStyle/>
+          <a:p>
+            <a:endParaRPr lang="es-PE"/>
+          </a:p>
+        </p:txBody>
       </p:sp>
       <p:sp>
         <p:nvSpPr>
@@ -3987,6 +3935,13 @@
             <a:prstDash val="solid"/>
           </a:ln>
         </p:spPr>
+        <p:txBody>
+          <a:bodyPr/>
+          <a:lstStyle/>
+          <a:p>
+            <a:endParaRPr lang="es-PE"/>
+          </a:p>
+        </p:txBody>
       </p:sp>
       <p:sp>
         <p:nvSpPr>
@@ -4011,6 +3966,13 @@
             <a:prstDash val="solid"/>
           </a:ln>
         </p:spPr>
+        <p:txBody>
+          <a:bodyPr/>
+          <a:lstStyle/>
+          <a:p>
+            <a:endParaRPr lang="es-PE"/>
+          </a:p>
+        </p:txBody>
       </p:sp>
       <p:sp>
         <p:nvSpPr>
@@ -4035,6 +3997,13 @@
             <a:prstDash val="solid"/>
           </a:ln>
         </p:spPr>
+        <p:txBody>
+          <a:bodyPr/>
+          <a:lstStyle/>
+          <a:p>
+            <a:endParaRPr lang="es-PE"/>
+          </a:p>
+        </p:txBody>
       </p:sp>
       <p:sp>
         <p:nvSpPr>
@@ -4057,7 +4026,7 @@
           <a:bodyPr wrap="square" lIns="0" tIns="0" rIns="0" bIns="0" rtlCol="0" anchor="ctr"/>
           <a:lstStyle/>
           <a:p>
-            <a:pPr algn="ctr" indent="0" marL="0">
+            <a:pPr marL="0" indent="0" algn="ctr">
               <a:buNone/>
             </a:pPr>
             <a:r>
@@ -4096,7 +4065,7 @@
           <a:bodyPr wrap="square" lIns="0" tIns="0" rIns="0" bIns="0" rtlCol="0" anchor="ctr"/>
           <a:lstStyle/>
           <a:p>
-            <a:pPr algn="ctr" indent="0" marL="0">
+            <a:pPr marL="0" indent="0" algn="ctr">
               <a:buNone/>
             </a:pPr>
             <a:r>
@@ -4130,6 +4099,7 @@
         <a:solidFill>
           <a:srgbClr val="0A1930"/>
         </a:solidFill>
+        <a:effectLst/>
       </p:bgPr>
     </p:bg>
     <p:spTree>
@@ -4167,11 +4137,11 @@
           <a:bodyPr wrap="square" lIns="0" tIns="0" rIns="0" bIns="0" rtlCol="0" anchor="ctr"/>
           <a:lstStyle/>
           <a:p>
-            <a:pPr indent="0" marL="0">
-              <a:buNone/>
-            </a:pPr>
-            <a:r>
-              <a:rPr lang="en-US" sz="1200" b="1" spc="200" kern="0" dirty="0">
+            <a:pPr marL="0" indent="0">
+              <a:buNone/>
+            </a:pPr>
+            <a:r>
+              <a:rPr lang="en-US" sz="1200" b="1" kern="0" spc="200" dirty="0">
                 <a:solidFill>
                   <a:srgbClr val="4FD1C5"/>
                 </a:solidFill>
@@ -4206,7 +4176,7 @@
           <a:bodyPr wrap="square" lIns="0" tIns="0" rIns="0" bIns="0" rtlCol="0" anchor="ctr"/>
           <a:lstStyle/>
           <a:p>
-            <a:pPr indent="0" marL="0">
+            <a:pPr marL="0" indent="0">
               <a:buNone/>
             </a:pPr>
             <a:r>
@@ -4245,6 +4215,13 @@
           </a:solidFill>
           <a:ln/>
         </p:spPr>
+        <p:txBody>
+          <a:bodyPr/>
+          <a:lstStyle/>
+          <a:p>
+            <a:endParaRPr lang="es-PE"/>
+          </a:p>
+        </p:txBody>
       </p:sp>
       <p:sp>
         <p:nvSpPr>
@@ -4267,7 +4244,7 @@
           <a:bodyPr wrap="square" lIns="0" tIns="0" rIns="0" bIns="0" rtlCol="0" anchor="ctr"/>
           <a:lstStyle/>
           <a:p>
-            <a:pPr indent="0" marL="0">
+            <a:pPr marL="0" indent="0">
               <a:buNone/>
             </a:pPr>
             <a:r>
@@ -4306,7 +4283,7 @@
           <a:bodyPr wrap="square" lIns="0" tIns="0" rIns="0" bIns="0" rtlCol="0" anchor="ctr"/>
           <a:lstStyle/>
           <a:p>
-            <a:pPr indent="0" marL="0">
+            <a:pPr marL="0" indent="0">
               <a:lnSpc>
                 <a:spcPct val="115000"/>
               </a:lnSpc>
@@ -4348,6 +4325,13 @@
           </a:solidFill>
           <a:ln/>
         </p:spPr>
+        <p:txBody>
+          <a:bodyPr/>
+          <a:lstStyle/>
+          <a:p>
+            <a:endParaRPr lang="es-PE"/>
+          </a:p>
+        </p:txBody>
       </p:sp>
       <p:sp>
         <p:nvSpPr>
@@ -4370,7 +4354,7 @@
           <a:bodyPr wrap="square" lIns="0" tIns="0" rIns="0" bIns="0" rtlCol="0" anchor="ctr"/>
           <a:lstStyle/>
           <a:p>
-            <a:pPr indent="0" marL="0">
+            <a:pPr marL="0" indent="0">
               <a:buNone/>
             </a:pPr>
             <a:r>
@@ -4409,7 +4393,7 @@
           <a:bodyPr wrap="square" lIns="0" tIns="0" rIns="0" bIns="0" rtlCol="0" anchor="ctr"/>
           <a:lstStyle/>
           <a:p>
-            <a:pPr indent="0" marL="0">
+            <a:pPr marL="0" indent="0">
               <a:lnSpc>
                 <a:spcPct val="115000"/>
               </a:lnSpc>
@@ -4451,6 +4435,13 @@
           </a:solidFill>
           <a:ln/>
         </p:spPr>
+        <p:txBody>
+          <a:bodyPr/>
+          <a:lstStyle/>
+          <a:p>
+            <a:endParaRPr lang="es-PE"/>
+          </a:p>
+        </p:txBody>
       </p:sp>
       <p:sp>
         <p:nvSpPr>
@@ -4473,7 +4464,7 @@
           <a:bodyPr wrap="square" lIns="0" tIns="0" rIns="0" bIns="0" rtlCol="0" anchor="ctr"/>
           <a:lstStyle/>
           <a:p>
-            <a:pPr indent="0" marL="0">
+            <a:pPr marL="0" indent="0">
               <a:buNone/>
             </a:pPr>
             <a:r>
@@ -4512,7 +4503,7 @@
           <a:bodyPr wrap="square" lIns="0" tIns="0" rIns="0" bIns="0" rtlCol="0" anchor="ctr"/>
           <a:lstStyle/>
           <a:p>
-            <a:pPr indent="0" marL="0">
+            <a:pPr marL="0" indent="0">
               <a:lnSpc>
                 <a:spcPct val="115000"/>
               </a:lnSpc>
@@ -4561,6 +4552,13 @@
             <a:prstDash val="solid"/>
           </a:ln>
         </p:spPr>
+        <p:txBody>
+          <a:bodyPr/>
+          <a:lstStyle/>
+          <a:p>
+            <a:endParaRPr lang="es-PE"/>
+          </a:p>
+        </p:txBody>
       </p:sp>
       <p:sp>
         <p:nvSpPr>
@@ -4583,11 +4581,11 @@
           <a:bodyPr wrap="square" lIns="0" tIns="0" rIns="0" bIns="0" rtlCol="0" anchor="ctr"/>
           <a:lstStyle/>
           <a:p>
-            <a:pPr indent="0" marL="0">
-              <a:buNone/>
-            </a:pPr>
-            <a:r>
-              <a:rPr lang="en-US" sz="1100" b="1" spc="150" kern="0" dirty="0">
+            <a:pPr marL="0" indent="0">
+              <a:buNone/>
+            </a:pPr>
+            <a:r>
+              <a:rPr lang="en-US" sz="1100" b="1" kern="0" spc="150" dirty="0">
                 <a:solidFill>
                   <a:srgbClr val="9FB3C8"/>
                 </a:solidFill>
@@ -4622,7 +4620,7 @@
           <a:bodyPr wrap="square" lIns="0" tIns="0" rIns="0" bIns="0" rtlCol="0" anchor="ctr"/>
           <a:lstStyle/>
           <a:p>
-            <a:pPr indent="0" marL="0">
+            <a:pPr marL="0" indent="0">
               <a:buNone/>
             </a:pPr>
             <a:r>
@@ -4661,7 +4659,7 @@
           <a:bodyPr wrap="square" lIns="0" tIns="0" rIns="0" bIns="0" rtlCol="0" anchor="ctr"/>
           <a:lstStyle/>
           <a:p>
-            <a:pPr indent="0" marL="0">
+            <a:pPr marL="0" indent="0">
               <a:buNone/>
             </a:pPr>
             <a:r>
@@ -4702,6 +4700,13 @@
           </a:solidFill>
           <a:ln/>
         </p:spPr>
+        <p:txBody>
+          <a:bodyPr/>
+          <a:lstStyle/>
+          <a:p>
+            <a:endParaRPr lang="es-PE"/>
+          </a:p>
+        </p:txBody>
       </p:sp>
       <p:sp>
         <p:nvSpPr>
@@ -4724,7 +4729,7 @@
           <a:bodyPr wrap="square" lIns="0" tIns="0" rIns="0" bIns="0" rtlCol="0" anchor="ctr"/>
           <a:lstStyle/>
           <a:p>
-            <a:pPr algn="ctr" indent="0" marL="0">
+            <a:pPr marL="0" indent="0" algn="ctr">
               <a:buNone/>
             </a:pPr>
             <a:r>
@@ -4763,7 +4768,7 @@
           <a:bodyPr wrap="square" lIns="0" tIns="0" rIns="0" bIns="0" rtlCol="0" anchor="ctr"/>
           <a:lstStyle/>
           <a:p>
-            <a:pPr indent="0" marL="0">
+            <a:pPr marL="0" indent="0">
               <a:buNone/>
             </a:pPr>
             <a:r>
@@ -4802,7 +4807,7 @@
           <a:bodyPr wrap="square" lIns="0" tIns="0" rIns="0" bIns="0" rtlCol="0" anchor="ctr"/>
           <a:lstStyle/>
           <a:p>
-            <a:pPr indent="0" marL="0">
+            <a:pPr marL="0" indent="0">
               <a:buNone/>
             </a:pPr>
             <a:r>
@@ -4841,7 +4846,7 @@
           <a:bodyPr wrap="square" lIns="0" tIns="0" rIns="0" bIns="0" rtlCol="0" anchor="ctr"/>
           <a:lstStyle/>
           <a:p>
-            <a:pPr indent="0" marL="0">
+            <a:pPr marL="0" indent="0">
               <a:buNone/>
             </a:pPr>
             <a:r>
@@ -4880,7 +4885,7 @@
           <a:bodyPr wrap="square" lIns="0" tIns="0" rIns="0" bIns="0" rtlCol="0" anchor="ctr"/>
           <a:lstStyle/>
           <a:p>
-            <a:pPr indent="0" marL="0">
+            <a:pPr marL="0" indent="0">
               <a:buNone/>
             </a:pPr>
             <a:r>
@@ -4919,7 +4924,7 @@
           <a:bodyPr wrap="square" lIns="0" tIns="0" rIns="0" bIns="0" rtlCol="0" anchor="ctr"/>
           <a:lstStyle/>
           <a:p>
-            <a:pPr indent="0" marL="0">
+            <a:pPr marL="0" indent="0">
               <a:buNone/>
             </a:pPr>
             <a:r>
@@ -4958,7 +4963,7 @@
           <a:bodyPr wrap="square" lIns="0" tIns="0" rIns="0" bIns="0" rtlCol="0" anchor="ctr"/>
           <a:lstStyle/>
           <a:p>
-            <a:pPr indent="0" marL="0">
+            <a:pPr marL="0" indent="0">
               <a:buNone/>
             </a:pPr>
             <a:r>
@@ -4997,7 +5002,7 @@
           <a:bodyPr wrap="square" lIns="0" tIns="0" rIns="0" bIns="0" rtlCol="0" anchor="ctr"/>
           <a:lstStyle/>
           <a:p>
-            <a:pPr algn="r" indent="0" marL="0">
+            <a:pPr marL="0" indent="0" algn="r">
               <a:buNone/>
             </a:pPr>
             <a:r>
@@ -5031,6 +5036,7 @@
         <a:solidFill>
           <a:srgbClr val="0A1930"/>
         </a:solidFill>
+        <a:effectLst/>
       </p:bgPr>
     </p:bg>
     <p:spTree>
@@ -5068,11 +5074,11 @@
           <a:bodyPr wrap="square" lIns="0" tIns="0" rIns="0" bIns="0" rtlCol="0" anchor="ctr"/>
           <a:lstStyle/>
           <a:p>
-            <a:pPr indent="0" marL="0">
-              <a:buNone/>
-            </a:pPr>
-            <a:r>
-              <a:rPr lang="en-US" sz="1200" b="1" spc="200" kern="0" dirty="0">
+            <a:pPr marL="0" indent="0">
+              <a:buNone/>
+            </a:pPr>
+            <a:r>
+              <a:rPr lang="en-US" sz="1200" b="1" kern="0" spc="200" dirty="0">
                 <a:solidFill>
                   <a:srgbClr val="4FD1C5"/>
                 </a:solidFill>
@@ -5107,7 +5113,7 @@
           <a:bodyPr wrap="square" lIns="0" tIns="0" rIns="0" bIns="0" rtlCol="0" anchor="ctr"/>
           <a:lstStyle/>
           <a:p>
-            <a:pPr indent="0" marL="0">
+            <a:pPr marL="0" indent="0">
               <a:buNone/>
             </a:pPr>
             <a:r>
@@ -5149,6 +5155,13 @@
             <a:prstDash val="solid"/>
           </a:ln>
         </p:spPr>
+        <p:txBody>
+          <a:bodyPr/>
+          <a:lstStyle/>
+          <a:p>
+            <a:endParaRPr lang="es-PE"/>
+          </a:p>
+        </p:txBody>
       </p:sp>
       <p:sp>
         <p:nvSpPr>
@@ -5174,6 +5187,13 @@
             <a:prstDash val="solid"/>
           </a:ln>
         </p:spPr>
+        <p:txBody>
+          <a:bodyPr/>
+          <a:lstStyle/>
+          <a:p>
+            <a:endParaRPr lang="es-PE"/>
+          </a:p>
+        </p:txBody>
       </p:sp>
       <p:sp>
         <p:nvSpPr>
@@ -5199,6 +5219,13 @@
             <a:prstDash val="solid"/>
           </a:ln>
         </p:spPr>
+        <p:txBody>
+          <a:bodyPr/>
+          <a:lstStyle/>
+          <a:p>
+            <a:endParaRPr lang="es-PE"/>
+          </a:p>
+        </p:txBody>
       </p:sp>
       <p:sp>
         <p:nvSpPr>
@@ -5224,6 +5251,13 @@
             <a:prstDash val="solid"/>
           </a:ln>
         </p:spPr>
+        <p:txBody>
+          <a:bodyPr/>
+          <a:lstStyle/>
+          <a:p>
+            <a:endParaRPr lang="es-PE"/>
+          </a:p>
+        </p:txBody>
       </p:sp>
       <p:sp>
         <p:nvSpPr>
@@ -5246,7 +5280,7 @@
           <a:bodyPr wrap="square" lIns="0" tIns="0" rIns="0" bIns="0" rtlCol="0" anchor="ctr"/>
           <a:lstStyle/>
           <a:p>
-            <a:pPr algn="ctr" indent="0" marL="0">
+            <a:pPr marL="0" indent="0" algn="ctr">
               <a:buNone/>
             </a:pPr>
             <a:r>
@@ -5283,6 +5317,13 @@
           </a:solidFill>
           <a:ln/>
         </p:spPr>
+        <p:txBody>
+          <a:bodyPr/>
+          <a:lstStyle/>
+          <a:p>
+            <a:endParaRPr lang="es-PE"/>
+          </a:p>
+        </p:txBody>
       </p:sp>
       <p:sp>
         <p:nvSpPr>
@@ -5305,7 +5346,7 @@
           <a:bodyPr wrap="square" lIns="0" tIns="0" rIns="0" bIns="0" rtlCol="0" anchor="ctr"/>
           <a:lstStyle/>
           <a:p>
-            <a:pPr indent="0" marL="0">
+            <a:pPr marL="0" indent="0">
               <a:buNone/>
             </a:pPr>
             <a:r>
@@ -5344,7 +5385,7 @@
           <a:bodyPr wrap="square" lIns="0" tIns="0" rIns="0" bIns="0" rtlCol="0" anchor="ctr"/>
           <a:lstStyle/>
           <a:p>
-            <a:pPr indent="0" marL="0">
+            <a:pPr marL="0" indent="0">
               <a:lnSpc>
                 <a:spcPct val="110000"/>
               </a:lnSpc>
@@ -5384,6 +5425,13 @@
           </a:solidFill>
           <a:ln/>
         </p:spPr>
+        <p:txBody>
+          <a:bodyPr/>
+          <a:lstStyle/>
+          <a:p>
+            <a:endParaRPr lang="es-PE"/>
+          </a:p>
+        </p:txBody>
       </p:sp>
       <p:sp>
         <p:nvSpPr>
@@ -5406,7 +5454,7 @@
           <a:bodyPr wrap="square" lIns="0" tIns="0" rIns="0" bIns="0" rtlCol="0" anchor="ctr"/>
           <a:lstStyle/>
           <a:p>
-            <a:pPr indent="0" marL="0">
+            <a:pPr marL="0" indent="0">
               <a:buNone/>
             </a:pPr>
             <a:r>
@@ -5445,7 +5493,7 @@
           <a:bodyPr wrap="square" lIns="0" tIns="0" rIns="0" bIns="0" rtlCol="0" anchor="ctr"/>
           <a:lstStyle/>
           <a:p>
-            <a:pPr indent="0" marL="0">
+            <a:pPr marL="0" indent="0">
               <a:lnSpc>
                 <a:spcPct val="110000"/>
               </a:lnSpc>
@@ -5485,6 +5533,13 @@
           </a:solidFill>
           <a:ln/>
         </p:spPr>
+        <p:txBody>
+          <a:bodyPr/>
+          <a:lstStyle/>
+          <a:p>
+            <a:endParaRPr lang="es-PE"/>
+          </a:p>
+        </p:txBody>
       </p:sp>
       <p:sp>
         <p:nvSpPr>
@@ -5507,7 +5562,7 @@
           <a:bodyPr wrap="square" lIns="0" tIns="0" rIns="0" bIns="0" rtlCol="0" anchor="ctr"/>
           <a:lstStyle/>
           <a:p>
-            <a:pPr indent="0" marL="0">
+            <a:pPr marL="0" indent="0">
               <a:buNone/>
             </a:pPr>
             <a:r>
@@ -5546,7 +5601,7 @@
           <a:bodyPr wrap="square" lIns="0" tIns="0" rIns="0" bIns="0" rtlCol="0" anchor="ctr"/>
           <a:lstStyle/>
           <a:p>
-            <a:pPr indent="0" marL="0">
+            <a:pPr marL="0" indent="0">
               <a:lnSpc>
                 <a:spcPct val="110000"/>
               </a:lnSpc>
@@ -5586,6 +5641,13 @@
           </a:solidFill>
           <a:ln/>
         </p:spPr>
+        <p:txBody>
+          <a:bodyPr/>
+          <a:lstStyle/>
+          <a:p>
+            <a:endParaRPr lang="es-PE"/>
+          </a:p>
+        </p:txBody>
       </p:sp>
       <p:sp>
         <p:nvSpPr>
@@ -5608,7 +5670,7 @@
           <a:bodyPr wrap="square" lIns="0" tIns="0" rIns="0" bIns="0" rtlCol="0" anchor="ctr"/>
           <a:lstStyle/>
           <a:p>
-            <a:pPr indent="0" marL="0">
+            <a:pPr marL="0" indent="0">
               <a:buNone/>
             </a:pPr>
             <a:r>
@@ -5647,7 +5709,7 @@
           <a:bodyPr wrap="square" lIns="0" tIns="0" rIns="0" bIns="0" rtlCol="0" anchor="ctr"/>
           <a:lstStyle/>
           <a:p>
-            <a:pPr indent="0" marL="0">
+            <a:pPr marL="0" indent="0">
               <a:lnSpc>
                 <a:spcPct val="110000"/>
               </a:lnSpc>
@@ -5689,6 +5751,13 @@
           </a:solidFill>
           <a:ln/>
         </p:spPr>
+        <p:txBody>
+          <a:bodyPr/>
+          <a:lstStyle/>
+          <a:p>
+            <a:endParaRPr lang="es-PE"/>
+          </a:p>
+        </p:txBody>
       </p:sp>
       <p:sp>
         <p:nvSpPr>
@@ -5711,11 +5780,11 @@
           <a:bodyPr wrap="square" lIns="0" tIns="0" rIns="0" bIns="0" rtlCol="0" anchor="ctr"/>
           <a:lstStyle/>
           <a:p>
-            <a:pPr indent="0" marL="0">
-              <a:buNone/>
-            </a:pPr>
-            <a:r>
-              <a:rPr lang="en-US" sz="1100" b="1" spc="150" kern="0" dirty="0">
+            <a:pPr marL="0" indent="0">
+              <a:buNone/>
+            </a:pPr>
+            <a:r>
+              <a:rPr lang="en-US" sz="1100" b="1" kern="0" spc="150" dirty="0">
                 <a:solidFill>
                   <a:srgbClr val="4FD1C5"/>
                 </a:solidFill>
@@ -5750,7 +5819,7 @@
           <a:bodyPr wrap="square" lIns="0" tIns="0" rIns="0" bIns="0" rtlCol="0" anchor="ctr"/>
           <a:lstStyle/>
           <a:p>
-            <a:pPr indent="0" marL="0">
+            <a:pPr marL="0" indent="0">
               <a:lnSpc>
                 <a:spcPct val="120000"/>
               </a:lnSpc>
@@ -5790,6 +5859,13 @@
           </a:solidFill>
           <a:ln/>
         </p:spPr>
+        <p:txBody>
+          <a:bodyPr/>
+          <a:lstStyle/>
+          <a:p>
+            <a:endParaRPr lang="es-PE"/>
+          </a:p>
+        </p:txBody>
       </p:sp>
       <p:sp>
         <p:nvSpPr>
@@ -5812,7 +5888,7 @@
           <a:bodyPr wrap="square" lIns="0" tIns="0" rIns="0" bIns="0" rtlCol="0" anchor="ctr"/>
           <a:lstStyle/>
           <a:p>
-            <a:pPr indent="0" marL="0">
+            <a:pPr marL="0" indent="0">
               <a:buNone/>
             </a:pPr>
             <a:r>
@@ -5849,6 +5925,13 @@
           </a:solidFill>
           <a:ln/>
         </p:spPr>
+        <p:txBody>
+          <a:bodyPr/>
+          <a:lstStyle/>
+          <a:p>
+            <a:endParaRPr lang="es-PE"/>
+          </a:p>
+        </p:txBody>
       </p:sp>
       <p:sp>
         <p:nvSpPr>
@@ -5871,7 +5954,7 @@
           <a:bodyPr wrap="square" lIns="0" tIns="0" rIns="0" bIns="0" rtlCol="0" anchor="ctr"/>
           <a:lstStyle/>
           <a:p>
-            <a:pPr indent="0" marL="0">
+            <a:pPr marL="0" indent="0">
               <a:buNone/>
             </a:pPr>
             <a:r>
@@ -5908,6 +5991,13 @@
           </a:solidFill>
           <a:ln/>
         </p:spPr>
+        <p:txBody>
+          <a:bodyPr/>
+          <a:lstStyle/>
+          <a:p>
+            <a:endParaRPr lang="es-PE"/>
+          </a:p>
+        </p:txBody>
       </p:sp>
       <p:sp>
         <p:nvSpPr>
@@ -5930,7 +6020,7 @@
           <a:bodyPr wrap="square" lIns="0" tIns="0" rIns="0" bIns="0" rtlCol="0" anchor="ctr"/>
           <a:lstStyle/>
           <a:p>
-            <a:pPr indent="0" marL="0">
+            <a:pPr marL="0" indent="0">
               <a:buNone/>
             </a:pPr>
             <a:r>
@@ -5967,6 +6057,13 @@
           </a:solidFill>
           <a:ln/>
         </p:spPr>
+        <p:txBody>
+          <a:bodyPr/>
+          <a:lstStyle/>
+          <a:p>
+            <a:endParaRPr lang="es-PE"/>
+          </a:p>
+        </p:txBody>
       </p:sp>
       <p:sp>
         <p:nvSpPr>
@@ -5989,7 +6086,7 @@
           <a:bodyPr wrap="square" lIns="0" tIns="0" rIns="0" bIns="0" rtlCol="0" anchor="ctr"/>
           <a:lstStyle/>
           <a:p>
-            <a:pPr indent="0" marL="0">
+            <a:pPr marL="0" indent="0">
               <a:buNone/>
             </a:pPr>
             <a:r>
@@ -6028,7 +6125,7 @@
           <a:bodyPr wrap="square" lIns="0" tIns="0" rIns="0" bIns="0" rtlCol="0" anchor="ctr"/>
           <a:lstStyle/>
           <a:p>
-            <a:pPr algn="r" indent="0" marL="0">
+            <a:pPr marL="0" indent="0" algn="r">
               <a:buNone/>
             </a:pPr>
             <a:r>
@@ -6062,6 +6159,7 @@
         <a:solidFill>
           <a:srgbClr val="0A1930"/>
         </a:solidFill>
+        <a:effectLst/>
       </p:bgPr>
     </p:bg>
     <p:spTree>
@@ -6099,11 +6197,11 @@
           <a:bodyPr wrap="square" lIns="0" tIns="0" rIns="0" bIns="0" rtlCol="0" anchor="ctr"/>
           <a:lstStyle/>
           <a:p>
-            <a:pPr indent="0" marL="0">
-              <a:buNone/>
-            </a:pPr>
-            <a:r>
-              <a:rPr lang="en-US" sz="1200" b="1" spc="200" kern="0" dirty="0">
+            <a:pPr marL="0" indent="0">
+              <a:buNone/>
+            </a:pPr>
+            <a:r>
+              <a:rPr lang="en-US" sz="1200" b="1" kern="0" spc="200" dirty="0">
                 <a:solidFill>
                   <a:srgbClr val="4FD1C5"/>
                 </a:solidFill>
@@ -6138,7 +6236,7 @@
           <a:bodyPr wrap="square" lIns="0" tIns="0" rIns="0" bIns="0" rtlCol="0" anchor="ctr"/>
           <a:lstStyle/>
           <a:p>
-            <a:pPr indent="0" marL="0">
+            <a:pPr marL="0" indent="0">
               <a:buNone/>
             </a:pPr>
             <a:r>
@@ -6179,10 +6277,34 @@
             <a:tbl>
               <a:tblPr/>
               <a:tblGrid>
-                <a:gridCol w="2651760"/>
-                <a:gridCol w="2468880"/>
-                <a:gridCol w="2651760"/>
-                <a:gridCol w="3291840"/>
+                <a:gridCol w="2651760">
+                  <a:extLst>
+                    <a:ext uri="{9D8B030D-6E8A-4147-A177-3AD203B41FA5}">
+                      <a16:colId xmlns:a16="http://schemas.microsoft.com/office/drawing/2014/main" val="20000"/>
+                    </a:ext>
+                  </a:extLst>
+                </a:gridCol>
+                <a:gridCol w="2468880">
+                  <a:extLst>
+                    <a:ext uri="{9D8B030D-6E8A-4147-A177-3AD203B41FA5}">
+                      <a16:colId xmlns:a16="http://schemas.microsoft.com/office/drawing/2014/main" val="20001"/>
+                    </a:ext>
+                  </a:extLst>
+                </a:gridCol>
+                <a:gridCol w="2651760">
+                  <a:extLst>
+                    <a:ext uri="{9D8B030D-6E8A-4147-A177-3AD203B41FA5}">
+                      <a16:colId xmlns:a16="http://schemas.microsoft.com/office/drawing/2014/main" val="20002"/>
+                    </a:ext>
+                  </a:extLst>
+                </a:gridCol>
+                <a:gridCol w="3291840">
+                  <a:extLst>
+                    <a:ext uri="{9D8B030D-6E8A-4147-A177-3AD203B41FA5}">
+                      <a16:colId xmlns:a16="http://schemas.microsoft.com/office/drawing/2014/main" val="20003"/>
+                    </a:ext>
+                  </a:extLst>
+                </a:gridCol>
               </a:tblGrid>
               <a:tr h="492760">
                 <a:tc>
@@ -6190,7 +6312,7 @@
                     <a:bodyPr/>
                     <a:lstStyle/>
                     <a:p>
-                      <a:pPr indent="0" marL="0">
+                      <a:pPr marL="0" indent="0">
                         <a:buNone/>
                       </a:pPr>
                       <a:r>
@@ -6258,7 +6380,7 @@
                     <a:bodyPr/>
                     <a:lstStyle/>
                     <a:p>
-                      <a:pPr indent="0" marL="0">
+                      <a:pPr marL="0" indent="0">
                         <a:buNone/>
                       </a:pPr>
                       <a:r>
@@ -6326,7 +6448,7 @@
                     <a:bodyPr/>
                     <a:lstStyle/>
                     <a:p>
-                      <a:pPr indent="0" marL="0">
+                      <a:pPr marL="0" indent="0">
                         <a:buNone/>
                       </a:pPr>
                       <a:r>
@@ -6394,7 +6516,7 @@
                     <a:bodyPr/>
                     <a:lstStyle/>
                     <a:p>
-                      <a:pPr indent="0" marL="0">
+                      <a:pPr marL="0" indent="0">
                         <a:buNone/>
                       </a:pPr>
                       <a:r>
@@ -6457,6 +6579,11 @@
                     </a:solidFill>
                   </a:tcPr>
                 </a:tc>
+                <a:extLst>
+                  <a:ext uri="{0D108BD9-81ED-4DB2-BD59-A6C34878D82A}">
+                    <a16:rowId xmlns:a16="http://schemas.microsoft.com/office/drawing/2014/main" val="10000"/>
+                  </a:ext>
+                </a:extLst>
               </a:tr>
               <a:tr h="492760">
                 <a:tc>
@@ -6464,7 +6591,7 @@
                     <a:bodyPr/>
                     <a:lstStyle/>
                     <a:p>
-                      <a:pPr indent="0" marL="0">
+                      <a:pPr marL="0" indent="0">
                         <a:buNone/>
                       </a:pPr>
                       <a:r>
@@ -6532,7 +6659,7 @@
                     <a:bodyPr/>
                     <a:lstStyle/>
                     <a:p>
-                      <a:pPr indent="0" marL="0">
+                      <a:pPr marL="0" indent="0">
                         <a:buNone/>
                       </a:pPr>
                       <a:r>
@@ -6600,7 +6727,7 @@
                     <a:bodyPr/>
                     <a:lstStyle/>
                     <a:p>
-                      <a:pPr indent="0" marL="0">
+                      <a:pPr marL="0" indent="0">
                         <a:buNone/>
                       </a:pPr>
                       <a:r>
@@ -6668,7 +6795,7 @@
                     <a:bodyPr/>
                     <a:lstStyle/>
                     <a:p>
-                      <a:pPr indent="0" marL="0">
+                      <a:pPr marL="0" indent="0">
                         <a:buNone/>
                       </a:pPr>
                       <a:r>
@@ -6731,6 +6858,11 @@
                     </a:solidFill>
                   </a:tcPr>
                 </a:tc>
+                <a:extLst>
+                  <a:ext uri="{0D108BD9-81ED-4DB2-BD59-A6C34878D82A}">
+                    <a16:rowId xmlns:a16="http://schemas.microsoft.com/office/drawing/2014/main" val="10001"/>
+                  </a:ext>
+                </a:extLst>
               </a:tr>
               <a:tr h="492760">
                 <a:tc>
@@ -6738,7 +6870,7 @@
                     <a:bodyPr/>
                     <a:lstStyle/>
                     <a:p>
-                      <a:pPr indent="0" marL="0">
+                      <a:pPr marL="0" indent="0">
                         <a:buNone/>
                       </a:pPr>
                       <a:r>
@@ -6806,7 +6938,7 @@
                     <a:bodyPr/>
                     <a:lstStyle/>
                     <a:p>
-                      <a:pPr indent="0" marL="0">
+                      <a:pPr marL="0" indent="0">
                         <a:buNone/>
                       </a:pPr>
                       <a:r>
@@ -6874,7 +7006,7 @@
                     <a:bodyPr/>
                     <a:lstStyle/>
                     <a:p>
-                      <a:pPr indent="0" marL="0">
+                      <a:pPr marL="0" indent="0">
                         <a:buNone/>
                       </a:pPr>
                       <a:r>
@@ -6942,7 +7074,7 @@
                     <a:bodyPr/>
                     <a:lstStyle/>
                     <a:p>
-                      <a:pPr indent="0" marL="0">
+                      <a:pPr marL="0" indent="0">
                         <a:buNone/>
                       </a:pPr>
                       <a:r>
@@ -7005,6 +7137,11 @@
                     </a:solidFill>
                   </a:tcPr>
                 </a:tc>
+                <a:extLst>
+                  <a:ext uri="{0D108BD9-81ED-4DB2-BD59-A6C34878D82A}">
+                    <a16:rowId xmlns:a16="http://schemas.microsoft.com/office/drawing/2014/main" val="10002"/>
+                  </a:ext>
+                </a:extLst>
               </a:tr>
               <a:tr h="492760">
                 <a:tc>
@@ -7012,7 +7149,7 @@
                     <a:bodyPr/>
                     <a:lstStyle/>
                     <a:p>
-                      <a:pPr indent="0" marL="0">
+                      <a:pPr marL="0" indent="0">
                         <a:buNone/>
                       </a:pPr>
                       <a:r>
@@ -7080,7 +7217,7 @@
                     <a:bodyPr/>
                     <a:lstStyle/>
                     <a:p>
-                      <a:pPr indent="0" marL="0">
+                      <a:pPr marL="0" indent="0">
                         <a:buNone/>
                       </a:pPr>
                       <a:r>
@@ -7148,7 +7285,7 @@
                     <a:bodyPr/>
                     <a:lstStyle/>
                     <a:p>
-                      <a:pPr indent="0" marL="0">
+                      <a:pPr marL="0" indent="0">
                         <a:buNone/>
                       </a:pPr>
                       <a:r>
@@ -7216,7 +7353,7 @@
                     <a:bodyPr/>
                     <a:lstStyle/>
                     <a:p>
-                      <a:pPr indent="0" marL="0">
+                      <a:pPr marL="0" indent="0">
                         <a:buNone/>
                       </a:pPr>
                       <a:r>
@@ -7279,6 +7416,11 @@
                     </a:solidFill>
                   </a:tcPr>
                 </a:tc>
+                <a:extLst>
+                  <a:ext uri="{0D108BD9-81ED-4DB2-BD59-A6C34878D82A}">
+                    <a16:rowId xmlns:a16="http://schemas.microsoft.com/office/drawing/2014/main" val="10003"/>
+                  </a:ext>
+                </a:extLst>
               </a:tr>
               <a:tr h="492760">
                 <a:tc>
@@ -7286,7 +7428,7 @@
                     <a:bodyPr/>
                     <a:lstStyle/>
                     <a:p>
-                      <a:pPr indent="0" marL="0">
+                      <a:pPr marL="0" indent="0">
                         <a:buNone/>
                       </a:pPr>
                       <a:r>
@@ -7354,7 +7496,7 @@
                     <a:bodyPr/>
                     <a:lstStyle/>
                     <a:p>
-                      <a:pPr indent="0" marL="0">
+                      <a:pPr marL="0" indent="0">
                         <a:buNone/>
                       </a:pPr>
                       <a:r>
@@ -7422,7 +7564,7 @@
                     <a:bodyPr/>
                     <a:lstStyle/>
                     <a:p>
-                      <a:pPr indent="0" marL="0">
+                      <a:pPr marL="0" indent="0">
                         <a:buNone/>
                       </a:pPr>
                       <a:r>
@@ -7490,7 +7632,7 @@
                     <a:bodyPr/>
                     <a:lstStyle/>
                     <a:p>
-                      <a:pPr indent="0" marL="0">
+                      <a:pPr marL="0" indent="0">
                         <a:buNone/>
                       </a:pPr>
                       <a:r>
@@ -7553,6 +7695,11 @@
                     </a:solidFill>
                   </a:tcPr>
                 </a:tc>
+                <a:extLst>
+                  <a:ext uri="{0D108BD9-81ED-4DB2-BD59-A6C34878D82A}">
+                    <a16:rowId xmlns:a16="http://schemas.microsoft.com/office/drawing/2014/main" val="10004"/>
+                  </a:ext>
+                </a:extLst>
               </a:tr>
               <a:tr h="492760">
                 <a:tc>
@@ -7560,7 +7707,7 @@
                     <a:bodyPr/>
                     <a:lstStyle/>
                     <a:p>
-                      <a:pPr indent="0" marL="0">
+                      <a:pPr marL="0" indent="0">
                         <a:buNone/>
                       </a:pPr>
                       <a:r>
@@ -7628,7 +7775,7 @@
                     <a:bodyPr/>
                     <a:lstStyle/>
                     <a:p>
-                      <a:pPr indent="0" marL="0">
+                      <a:pPr marL="0" indent="0">
                         <a:buNone/>
                       </a:pPr>
                       <a:r>
@@ -7696,7 +7843,7 @@
                     <a:bodyPr/>
                     <a:lstStyle/>
                     <a:p>
-                      <a:pPr indent="0" marL="0">
+                      <a:pPr marL="0" indent="0">
                         <a:buNone/>
                       </a:pPr>
                       <a:r>
@@ -7764,7 +7911,7 @@
                     <a:bodyPr/>
                     <a:lstStyle/>
                     <a:p>
-                      <a:pPr indent="0" marL="0">
+                      <a:pPr marL="0" indent="0">
                         <a:buNone/>
                       </a:pPr>
                       <a:r>
@@ -7827,6 +7974,11 @@
                     </a:solidFill>
                   </a:tcPr>
                 </a:tc>
+                <a:extLst>
+                  <a:ext uri="{0D108BD9-81ED-4DB2-BD59-A6C34878D82A}">
+                    <a16:rowId xmlns:a16="http://schemas.microsoft.com/office/drawing/2014/main" val="10005"/>
+                  </a:ext>
+                </a:extLst>
               </a:tr>
               <a:tr h="492760">
                 <a:tc>
@@ -7834,7 +7986,7 @@
                     <a:bodyPr/>
                     <a:lstStyle/>
                     <a:p>
-                      <a:pPr indent="0" marL="0">
+                      <a:pPr marL="0" indent="0">
                         <a:buNone/>
                       </a:pPr>
                       <a:r>
@@ -7902,7 +8054,7 @@
                     <a:bodyPr/>
                     <a:lstStyle/>
                     <a:p>
-                      <a:pPr indent="0" marL="0">
+                      <a:pPr marL="0" indent="0">
                         <a:buNone/>
                       </a:pPr>
                       <a:r>
@@ -7970,7 +8122,7 @@
                     <a:bodyPr/>
                     <a:lstStyle/>
                     <a:p>
-                      <a:pPr indent="0" marL="0">
+                      <a:pPr marL="0" indent="0">
                         <a:buNone/>
                       </a:pPr>
                       <a:r>
@@ -8038,7 +8190,7 @@
                     <a:bodyPr/>
                     <a:lstStyle/>
                     <a:p>
-                      <a:pPr indent="0" marL="0">
+                      <a:pPr marL="0" indent="0">
                         <a:buNone/>
                       </a:pPr>
                       <a:r>
@@ -8101,6 +8253,11 @@
                     </a:solidFill>
                   </a:tcPr>
                 </a:tc>
+                <a:extLst>
+                  <a:ext uri="{0D108BD9-81ED-4DB2-BD59-A6C34878D82A}">
+                    <a16:rowId xmlns:a16="http://schemas.microsoft.com/office/drawing/2014/main" val="10006"/>
+                  </a:ext>
+                </a:extLst>
               </a:tr>
               <a:tr h="492760">
                 <a:tc>
@@ -8108,7 +8265,7 @@
                     <a:bodyPr/>
                     <a:lstStyle/>
                     <a:p>
-                      <a:pPr indent="0" marL="0">
+                      <a:pPr marL="0" indent="0">
                         <a:buNone/>
                       </a:pPr>
                       <a:r>
@@ -8176,7 +8333,7 @@
                     <a:bodyPr/>
                     <a:lstStyle/>
                     <a:p>
-                      <a:pPr indent="0" marL="0">
+                      <a:pPr marL="0" indent="0">
                         <a:buNone/>
                       </a:pPr>
                       <a:r>
@@ -8244,7 +8401,7 @@
                     <a:bodyPr/>
                     <a:lstStyle/>
                     <a:p>
-                      <a:pPr indent="0" marL="0">
+                      <a:pPr marL="0" indent="0">
                         <a:buNone/>
                       </a:pPr>
                       <a:r>
@@ -8312,7 +8469,7 @@
                     <a:bodyPr/>
                     <a:lstStyle/>
                     <a:p>
-                      <a:pPr indent="0" marL="0">
+                      <a:pPr marL="0" indent="0">
                         <a:buNone/>
                       </a:pPr>
                       <a:r>
@@ -8375,6 +8532,11 @@
                     </a:solidFill>
                   </a:tcPr>
                 </a:tc>
+                <a:extLst>
+                  <a:ext uri="{0D108BD9-81ED-4DB2-BD59-A6C34878D82A}">
+                    <a16:rowId xmlns:a16="http://schemas.microsoft.com/office/drawing/2014/main" val="10007"/>
+                  </a:ext>
+                </a:extLst>
               </a:tr>
               <a:tr h="492760">
                 <a:tc>
@@ -8382,7 +8544,7 @@
                     <a:bodyPr/>
                     <a:lstStyle/>
                     <a:p>
-                      <a:pPr indent="0" marL="0">
+                      <a:pPr marL="0" indent="0">
                         <a:buNone/>
                       </a:pPr>
                       <a:r>
@@ -8450,7 +8612,7 @@
                     <a:bodyPr/>
                     <a:lstStyle/>
                     <a:p>
-                      <a:pPr indent="0" marL="0">
+                      <a:pPr marL="0" indent="0">
                         <a:buNone/>
                       </a:pPr>
                       <a:r>
@@ -8518,7 +8680,7 @@
                     <a:bodyPr/>
                     <a:lstStyle/>
                     <a:p>
-                      <a:pPr indent="0" marL="0">
+                      <a:pPr marL="0" indent="0">
                         <a:buNone/>
                       </a:pPr>
                       <a:r>
@@ -8586,7 +8748,7 @@
                     <a:bodyPr/>
                     <a:lstStyle/>
                     <a:p>
-                      <a:pPr indent="0" marL="0">
+                      <a:pPr marL="0" indent="0">
                         <a:buNone/>
                       </a:pPr>
                       <a:r>
@@ -8649,6 +8811,11 @@
                     </a:solidFill>
                   </a:tcPr>
                 </a:tc>
+                <a:extLst>
+                  <a:ext uri="{0D108BD9-81ED-4DB2-BD59-A6C34878D82A}">
+                    <a16:rowId xmlns:a16="http://schemas.microsoft.com/office/drawing/2014/main" val="10008"/>
+                  </a:ext>
+                </a:extLst>
               </a:tr>
             </a:tbl>
           </a:graphicData>
@@ -8656,7 +8823,7 @@
       </p:graphicFrame>
       <p:sp>
         <p:nvSpPr>
-          <p:cNvPr id="5" name="Text 2"/>
+          <p:cNvPr id="4" name="Text 2"/>
           <p:cNvSpPr/>
           <p:nvPr/>
         </p:nvSpPr>
@@ -8675,7 +8842,7 @@
           <a:bodyPr wrap="square" lIns="0" tIns="0" rIns="0" bIns="0" rtlCol="0" anchor="ctr"/>
           <a:lstStyle/>
           <a:p>
-            <a:pPr indent="0" marL="0">
+            <a:pPr marL="0" indent="0">
               <a:buNone/>
             </a:pPr>
             <a:r>
@@ -8714,7 +8881,7 @@
           <a:bodyPr wrap="square" lIns="0" tIns="0" rIns="0" bIns="0" rtlCol="0" anchor="ctr"/>
           <a:lstStyle/>
           <a:p>
-            <a:pPr algn="r" indent="0" marL="0">
+            <a:pPr marL="0" indent="0" algn="r">
               <a:buNone/>
             </a:pPr>
             <a:r>
@@ -8748,6 +8915,7 @@
         <a:solidFill>
           <a:srgbClr val="0A1930"/>
         </a:solidFill>
+        <a:effectLst/>
       </p:bgPr>
     </p:bg>
     <p:spTree>
@@ -8785,11 +8953,11 @@
           <a:bodyPr wrap="square" lIns="0" tIns="0" rIns="0" bIns="0" rtlCol="0" anchor="ctr"/>
           <a:lstStyle/>
           <a:p>
-            <a:pPr indent="0" marL="0">
-              <a:buNone/>
-            </a:pPr>
-            <a:r>
-              <a:rPr lang="en-US" sz="1200" b="1" spc="200" kern="0" dirty="0">
+            <a:pPr marL="0" indent="0">
+              <a:buNone/>
+            </a:pPr>
+            <a:r>
+              <a:rPr lang="en-US" sz="1200" b="1" kern="0" spc="200" dirty="0">
                 <a:solidFill>
                   <a:srgbClr val="4FD1C5"/>
                 </a:solidFill>
@@ -8824,7 +8992,7 @@
           <a:bodyPr wrap="square" lIns="0" tIns="0" rIns="0" bIns="0" rtlCol="0" anchor="ctr"/>
           <a:lstStyle/>
           <a:p>
-            <a:pPr indent="0" marL="0">
+            <a:pPr marL="0" indent="0">
               <a:buNone/>
             </a:pPr>
             <a:r>
@@ -8863,6 +9031,13 @@
           </a:solidFill>
           <a:ln/>
         </p:spPr>
+        <p:txBody>
+          <a:bodyPr/>
+          <a:lstStyle/>
+          <a:p>
+            <a:endParaRPr lang="es-PE"/>
+          </a:p>
+        </p:txBody>
       </p:sp>
       <p:sp>
         <p:nvSpPr>
@@ -8887,6 +9062,13 @@
           </a:solidFill>
           <a:ln/>
         </p:spPr>
+        <p:txBody>
+          <a:bodyPr/>
+          <a:lstStyle/>
+          <a:p>
+            <a:endParaRPr lang="es-PE"/>
+          </a:p>
+        </p:txBody>
       </p:sp>
       <p:sp>
         <p:nvSpPr>
@@ -8909,7 +9091,7 @@
           <a:bodyPr wrap="square" lIns="0" tIns="0" rIns="0" bIns="0" rtlCol="0" anchor="ctr"/>
           <a:lstStyle/>
           <a:p>
-            <a:pPr algn="ctr" indent="0" marL="0">
+            <a:pPr marL="0" indent="0" algn="ctr">
               <a:buNone/>
             </a:pPr>
             <a:r>
@@ -8948,7 +9130,7 @@
           <a:bodyPr wrap="square" lIns="0" tIns="0" rIns="0" bIns="0" rtlCol="0" anchor="ctr"/>
           <a:lstStyle/>
           <a:p>
-            <a:pPr indent="0" marL="0">
+            <a:pPr marL="0" indent="0">
               <a:buNone/>
             </a:pPr>
             <a:r>
@@ -8987,7 +9169,7 @@
           <a:bodyPr wrap="square" lIns="0" tIns="0" rIns="0" bIns="0" rtlCol="0" anchor="ctr"/>
           <a:lstStyle/>
           <a:p>
-            <a:pPr indent="0" marL="0">
+            <a:pPr marL="0" indent="0">
               <a:lnSpc>
                 <a:spcPct val="120000"/>
               </a:lnSpc>
@@ -9029,6 +9211,13 @@
           </a:solidFill>
           <a:ln/>
         </p:spPr>
+        <p:txBody>
+          <a:bodyPr/>
+          <a:lstStyle/>
+          <a:p>
+            <a:endParaRPr lang="es-PE"/>
+          </a:p>
+        </p:txBody>
       </p:sp>
       <p:sp>
         <p:nvSpPr>
@@ -9051,7 +9240,7 @@
           <a:bodyPr wrap="square" lIns="0" tIns="0" rIns="0" bIns="0" rtlCol="0" anchor="ctr"/>
           <a:lstStyle/>
           <a:p>
-            <a:pPr indent="0" marL="0">
+            <a:pPr marL="0" indent="0">
               <a:buNone/>
             </a:pPr>
             <a:r>
@@ -9090,7 +9279,7 @@
           <a:bodyPr wrap="square" lIns="0" tIns="0" rIns="0" bIns="0" rtlCol="0" anchor="ctr"/>
           <a:lstStyle/>
           <a:p>
-            <a:pPr indent="0" marL="0">
+            <a:pPr marL="0" indent="0">
               <a:buNone/>
             </a:pPr>
             <a:r>
@@ -9129,6 +9318,13 @@
           </a:solidFill>
           <a:ln/>
         </p:spPr>
+        <p:txBody>
+          <a:bodyPr/>
+          <a:lstStyle/>
+          <a:p>
+            <a:endParaRPr lang="es-PE"/>
+          </a:p>
+        </p:txBody>
       </p:sp>
       <p:sp>
         <p:nvSpPr>
@@ -9151,7 +9347,7 @@
           <a:bodyPr wrap="square" lIns="0" tIns="0" rIns="0" bIns="0" rtlCol="0" anchor="ctr"/>
           <a:lstStyle/>
           <a:p>
-            <a:pPr indent="0" marL="0">
+            <a:pPr marL="0" indent="0">
               <a:buNone/>
             </a:pPr>
             <a:r>
@@ -9190,7 +9386,7 @@
           <a:bodyPr wrap="square" lIns="0" tIns="0" rIns="0" bIns="0" rtlCol="0" anchor="ctr"/>
           <a:lstStyle/>
           <a:p>
-            <a:pPr indent="0" marL="0">
+            <a:pPr marL="0" indent="0">
               <a:buNone/>
             </a:pPr>
             <a:r>
@@ -9229,6 +9425,13 @@
           </a:solidFill>
           <a:ln/>
         </p:spPr>
+        <p:txBody>
+          <a:bodyPr/>
+          <a:lstStyle/>
+          <a:p>
+            <a:endParaRPr lang="es-PE"/>
+          </a:p>
+        </p:txBody>
       </p:sp>
       <p:sp>
         <p:nvSpPr>
@@ -9253,6 +9456,13 @@
           </a:solidFill>
           <a:ln/>
         </p:spPr>
+        <p:txBody>
+          <a:bodyPr/>
+          <a:lstStyle/>
+          <a:p>
+            <a:endParaRPr lang="es-PE"/>
+          </a:p>
+        </p:txBody>
       </p:sp>
       <p:sp>
         <p:nvSpPr>
@@ -9275,7 +9485,7 @@
           <a:bodyPr wrap="square" lIns="0" tIns="0" rIns="0" bIns="0" rtlCol="0" anchor="ctr"/>
           <a:lstStyle/>
           <a:p>
-            <a:pPr algn="ctr" indent="0" marL="0">
+            <a:pPr marL="0" indent="0" algn="ctr">
               <a:buNone/>
             </a:pPr>
             <a:r>
@@ -9314,7 +9524,7 @@
           <a:bodyPr wrap="square" lIns="0" tIns="0" rIns="0" bIns="0" rtlCol="0" anchor="ctr"/>
           <a:lstStyle/>
           <a:p>
-            <a:pPr indent="0" marL="0">
+            <a:pPr marL="0" indent="0">
               <a:buNone/>
             </a:pPr>
             <a:r>
@@ -9353,7 +9563,7 @@
           <a:bodyPr wrap="square" lIns="0" tIns="0" rIns="0" bIns="0" rtlCol="0" anchor="ctr"/>
           <a:lstStyle/>
           <a:p>
-            <a:pPr indent="0" marL="0">
+            <a:pPr marL="0" indent="0">
               <a:lnSpc>
                 <a:spcPct val="120000"/>
               </a:lnSpc>
@@ -9395,7 +9605,7 @@
           <a:bodyPr wrap="square" lIns="0" tIns="0" rIns="0" bIns="0" rtlCol="0" anchor="ctr"/>
           <a:lstStyle/>
           <a:p>
-            <a:pPr indent="0" marL="0">
+            <a:pPr marL="0" indent="0">
               <a:buNone/>
             </a:pPr>
             <a:r>
@@ -9434,7 +9644,7 @@
           <a:bodyPr wrap="square" lIns="0" tIns="0" rIns="0" bIns="0" rtlCol="0" anchor="ctr"/>
           <a:lstStyle/>
           <a:p>
-            <a:pPr indent="0" marL="0">
+            <a:pPr marL="0" indent="0">
               <a:buNone/>
             </a:pPr>
             <a:r>
@@ -9473,7 +9683,7 @@
           <a:bodyPr wrap="square" lIns="0" tIns="0" rIns="0" bIns="0" rtlCol="0" anchor="ctr"/>
           <a:lstStyle/>
           <a:p>
-            <a:pPr indent="0" marL="0">
+            <a:pPr marL="0" indent="0">
               <a:buNone/>
             </a:pPr>
             <a:r>
@@ -9512,7 +9722,7 @@
           <a:bodyPr wrap="square" lIns="0" tIns="0" rIns="0" bIns="0" rtlCol="0" anchor="ctr"/>
           <a:lstStyle/>
           <a:p>
-            <a:pPr indent="0" marL="0">
+            <a:pPr marL="0" indent="0">
               <a:buNone/>
             </a:pPr>
             <a:r>
@@ -9551,7 +9761,7 @@
           <a:bodyPr wrap="square" lIns="0" tIns="0" rIns="0" bIns="0" rtlCol="0" anchor="ctr"/>
           <a:lstStyle/>
           <a:p>
-            <a:pPr indent="0" marL="0">
+            <a:pPr marL="0" indent="0">
               <a:buNone/>
             </a:pPr>
             <a:r>
@@ -9590,7 +9800,7 @@
           <a:bodyPr wrap="square" lIns="0" tIns="0" rIns="0" bIns="0" rtlCol="0" anchor="ctr"/>
           <a:lstStyle/>
           <a:p>
-            <a:pPr indent="0" marL="0">
+            <a:pPr marL="0" indent="0">
               <a:buNone/>
             </a:pPr>
             <a:r>
@@ -9629,7 +9839,7 @@
           <a:bodyPr wrap="square" lIns="0" tIns="0" rIns="0" bIns="0" rtlCol="0" anchor="ctr"/>
           <a:lstStyle/>
           <a:p>
-            <a:pPr algn="r" indent="0" marL="0">
+            <a:pPr marL="0" indent="0" algn="r">
               <a:buNone/>
             </a:pPr>
             <a:r>
@@ -9663,6 +9873,7 @@
         <a:solidFill>
           <a:srgbClr val="0A1930"/>
         </a:solidFill>
+        <a:effectLst/>
       </p:bgPr>
     </p:bg>
     <p:spTree>
@@ -9700,11 +9911,11 @@
           <a:bodyPr wrap="square" lIns="0" tIns="0" rIns="0" bIns="0" rtlCol="0" anchor="ctr"/>
           <a:lstStyle/>
           <a:p>
-            <a:pPr indent="0" marL="0">
-              <a:buNone/>
-            </a:pPr>
-            <a:r>
-              <a:rPr lang="en-US" sz="1200" b="1" spc="200" kern="0" dirty="0">
+            <a:pPr marL="0" indent="0">
+              <a:buNone/>
+            </a:pPr>
+            <a:r>
+              <a:rPr lang="en-US" sz="1200" b="1" kern="0" spc="200" dirty="0">
                 <a:solidFill>
                   <a:srgbClr val="4FD1C5"/>
                 </a:solidFill>
@@ -9739,7 +9950,7 @@
           <a:bodyPr wrap="square" lIns="0" tIns="0" rIns="0" bIns="0" rtlCol="0" anchor="ctr"/>
           <a:lstStyle/>
           <a:p>
-            <a:pPr indent="0" marL="0">
+            <a:pPr marL="0" indent="0">
               <a:buNone/>
             </a:pPr>
             <a:r>
@@ -9780,6 +9991,13 @@
           </a:solidFill>
           <a:ln/>
         </p:spPr>
+        <p:txBody>
+          <a:bodyPr/>
+          <a:lstStyle/>
+          <a:p>
+            <a:endParaRPr lang="es-PE"/>
+          </a:p>
+        </p:txBody>
       </p:sp>
       <p:sp>
         <p:nvSpPr>
@@ -9802,7 +10020,7 @@
           <a:bodyPr wrap="square" lIns="0" tIns="0" rIns="0" bIns="0" rtlCol="0" anchor="ctr"/>
           <a:lstStyle/>
           <a:p>
-            <a:pPr algn="ctr" indent="0" marL="0">
+            <a:pPr marL="0" indent="0" algn="ctr">
               <a:buNone/>
             </a:pPr>
             <a:r>
@@ -9841,7 +10059,7 @@
           <a:bodyPr wrap="square" lIns="0" tIns="0" rIns="0" bIns="0" rtlCol="0" anchor="ctr"/>
           <a:lstStyle/>
           <a:p>
-            <a:pPr indent="0" marL="0">
+            <a:pPr marL="0" indent="0">
               <a:lnSpc>
                 <a:spcPct val="115000"/>
               </a:lnSpc>
@@ -9883,7 +10101,7 @@
           <a:bodyPr wrap="square" lIns="0" tIns="0" rIns="0" bIns="0" rtlCol="0" anchor="ctr"/>
           <a:lstStyle/>
           <a:p>
-            <a:pPr indent="0" marL="0">
+            <a:pPr marL="0" indent="0">
               <a:lnSpc>
                 <a:spcPct val="115000"/>
               </a:lnSpc>
@@ -9927,6 +10145,13 @@
           </a:solidFill>
           <a:ln/>
         </p:spPr>
+        <p:txBody>
+          <a:bodyPr/>
+          <a:lstStyle/>
+          <a:p>
+            <a:endParaRPr lang="es-PE"/>
+          </a:p>
+        </p:txBody>
       </p:sp>
       <p:sp>
         <p:nvSpPr>
@@ -9949,7 +10174,7 @@
           <a:bodyPr wrap="square" lIns="0" tIns="0" rIns="0" bIns="0" rtlCol="0" anchor="ctr"/>
           <a:lstStyle/>
           <a:p>
-            <a:pPr algn="ctr" indent="0" marL="0">
+            <a:pPr marL="0" indent="0" algn="ctr">
               <a:buNone/>
             </a:pPr>
             <a:r>
@@ -9988,7 +10213,7 @@
           <a:bodyPr wrap="square" lIns="0" tIns="0" rIns="0" bIns="0" rtlCol="0" anchor="ctr"/>
           <a:lstStyle/>
           <a:p>
-            <a:pPr indent="0" marL="0">
+            <a:pPr marL="0" indent="0">
               <a:lnSpc>
                 <a:spcPct val="115000"/>
               </a:lnSpc>
@@ -10032,6 +10257,13 @@
           </a:solidFill>
           <a:ln/>
         </p:spPr>
+        <p:txBody>
+          <a:bodyPr/>
+          <a:lstStyle/>
+          <a:p>
+            <a:endParaRPr lang="es-PE"/>
+          </a:p>
+        </p:txBody>
       </p:sp>
       <p:sp>
         <p:nvSpPr>
@@ -10054,7 +10286,7 @@
           <a:bodyPr wrap="square" lIns="0" tIns="0" rIns="0" bIns="0" rtlCol="0" anchor="ctr"/>
           <a:lstStyle/>
           <a:p>
-            <a:pPr algn="ctr" indent="0" marL="0">
+            <a:pPr marL="0" indent="0" algn="ctr">
               <a:buNone/>
             </a:pPr>
             <a:r>
@@ -10093,7 +10325,7 @@
           <a:bodyPr wrap="square" lIns="0" tIns="0" rIns="0" bIns="0" rtlCol="0" anchor="ctr"/>
           <a:lstStyle/>
           <a:p>
-            <a:pPr indent="0" marL="0">
+            <a:pPr marL="0" indent="0">
               <a:lnSpc>
                 <a:spcPct val="115000"/>
               </a:lnSpc>
@@ -10142,6 +10374,13 @@
             <a:prstDash val="solid"/>
           </a:ln>
         </p:spPr>
+        <p:txBody>
+          <a:bodyPr/>
+          <a:lstStyle/>
+          <a:p>
+            <a:endParaRPr lang="es-PE"/>
+          </a:p>
+        </p:txBody>
       </p:sp>
       <p:sp>
         <p:nvSpPr>
@@ -10164,7 +10403,7 @@
           <a:bodyPr wrap="square" lIns="0" tIns="0" rIns="0" bIns="0" rtlCol="0" anchor="ctr"/>
           <a:lstStyle/>
           <a:p>
-            <a:pPr indent="0" marL="0">
+            <a:pPr marL="0" indent="0">
               <a:buNone/>
             </a:pPr>
             <a:r>
@@ -10203,7 +10442,7 @@
           <a:bodyPr wrap="square" lIns="0" tIns="0" rIns="0" bIns="0" rtlCol="0" anchor="ctr"/>
           <a:lstStyle/>
           <a:p>
-            <a:pPr indent="0" marL="0">
+            <a:pPr marL="0" indent="0">
               <a:lnSpc>
                 <a:spcPct val="125000"/>
               </a:lnSpc>
@@ -10252,6 +10491,13 @@
             <a:prstDash val="solid"/>
           </a:ln>
         </p:spPr>
+        <p:txBody>
+          <a:bodyPr/>
+          <a:lstStyle/>
+          <a:p>
+            <a:endParaRPr lang="es-PE"/>
+          </a:p>
+        </p:txBody>
       </p:sp>
       <p:sp>
         <p:nvSpPr>
@@ -10274,7 +10520,7 @@
           <a:bodyPr wrap="square" lIns="0" tIns="0" rIns="0" bIns="0" rtlCol="0" anchor="ctr"/>
           <a:lstStyle/>
           <a:p>
-            <a:pPr indent="0" marL="0">
+            <a:pPr marL="0" indent="0">
               <a:buNone/>
             </a:pPr>
             <a:r>
@@ -10313,7 +10559,7 @@
           <a:bodyPr wrap="square" lIns="0" tIns="0" rIns="0" bIns="0" rtlCol="0" anchor="ctr"/>
           <a:lstStyle/>
           <a:p>
-            <a:pPr indent="0" marL="0">
+            <a:pPr marL="0" indent="0">
               <a:lnSpc>
                 <a:spcPct val="125000"/>
               </a:lnSpc>
@@ -10355,7 +10601,7 @@
           <a:bodyPr wrap="square" lIns="0" tIns="0" rIns="0" bIns="0" rtlCol="0" anchor="ctr"/>
           <a:lstStyle/>
           <a:p>
-            <a:pPr indent="0" marL="0">
+            <a:pPr marL="0" indent="0">
               <a:buNone/>
             </a:pPr>
             <a:r>
@@ -10394,7 +10640,7 @@
           <a:bodyPr wrap="square" lIns="0" tIns="0" rIns="0" bIns="0" rtlCol="0" anchor="ctr"/>
           <a:lstStyle/>
           <a:p>
-            <a:pPr algn="r" indent="0" marL="0">
+            <a:pPr marL="0" indent="0" algn="r">
               <a:buNone/>
             </a:pPr>
             <a:r>
@@ -10428,6 +10674,7 @@
         <a:solidFill>
           <a:srgbClr val="0A1930"/>
         </a:solidFill>
+        <a:effectLst/>
       </p:bgPr>
     </p:bg>
     <p:spTree>
@@ -10465,11 +10712,11 @@
           <a:bodyPr wrap="square" lIns="0" tIns="0" rIns="0" bIns="0" rtlCol="0" anchor="ctr"/>
           <a:lstStyle/>
           <a:p>
-            <a:pPr indent="0" marL="0">
-              <a:buNone/>
-            </a:pPr>
-            <a:r>
-              <a:rPr lang="en-US" sz="1200" b="1" spc="200" kern="0" dirty="0">
+            <a:pPr marL="0" indent="0">
+              <a:buNone/>
+            </a:pPr>
+            <a:r>
+              <a:rPr lang="en-US" sz="1200" b="1" kern="0" spc="200" dirty="0">
                 <a:solidFill>
                   <a:srgbClr val="4FD1C5"/>
                 </a:solidFill>
@@ -10504,7 +10751,7 @@
           <a:bodyPr wrap="square" lIns="0" tIns="0" rIns="0" bIns="0" rtlCol="0" anchor="ctr"/>
           <a:lstStyle/>
           <a:p>
-            <a:pPr indent="0" marL="0">
+            <a:pPr marL="0" indent="0">
               <a:buNone/>
             </a:pPr>
             <a:r>
@@ -10543,6 +10790,13 @@
           </a:solidFill>
           <a:ln/>
         </p:spPr>
+        <p:txBody>
+          <a:bodyPr/>
+          <a:lstStyle/>
+          <a:p>
+            <a:endParaRPr lang="es-PE"/>
+          </a:p>
+        </p:txBody>
       </p:sp>
       <p:sp>
         <p:nvSpPr>
@@ -10567,6 +10821,13 @@
           </a:solidFill>
           <a:ln/>
         </p:spPr>
+        <p:txBody>
+          <a:bodyPr/>
+          <a:lstStyle/>
+          <a:p>
+            <a:endParaRPr lang="es-PE"/>
+          </a:p>
+        </p:txBody>
       </p:sp>
       <p:sp>
         <p:nvSpPr>
@@ -10589,7 +10850,7 @@
           <a:bodyPr wrap="square" lIns="0" tIns="0" rIns="0" bIns="0" rtlCol="0" anchor="ctr"/>
           <a:lstStyle/>
           <a:p>
-            <a:pPr algn="ctr" indent="0" marL="0">
+            <a:pPr marL="0" indent="0" algn="ctr">
               <a:buNone/>
             </a:pPr>
             <a:r>
@@ -10628,7 +10889,7 @@
           <a:bodyPr wrap="square" lIns="0" tIns="0" rIns="0" bIns="0" rtlCol="0" anchor="ctr"/>
           <a:lstStyle/>
           <a:p>
-            <a:pPr indent="0" marL="0">
+            <a:pPr marL="0" indent="0">
               <a:buNone/>
             </a:pPr>
             <a:r>
@@ -10667,7 +10928,7 @@
           <a:bodyPr wrap="square" lIns="0" tIns="0" rIns="0" bIns="0" rtlCol="0" anchor="ctr"/>
           <a:lstStyle/>
           <a:p>
-            <a:pPr indent="0" marL="0">
+            <a:pPr marL="0" indent="0">
               <a:buNone/>
             </a:pPr>
             <a:r>
@@ -10706,7 +10967,7 @@
           <a:bodyPr wrap="square" lIns="0" tIns="0" rIns="0" bIns="0" rtlCol="0" anchor="ctr"/>
           <a:lstStyle/>
           <a:p>
-            <a:pPr indent="0" marL="0">
+            <a:pPr marL="0" indent="0">
               <a:lnSpc>
                 <a:spcPct val="105000"/>
               </a:lnSpc>
@@ -10748,7 +11009,7 @@
           <a:bodyPr wrap="square" lIns="0" tIns="0" rIns="0" bIns="0" rtlCol="0" anchor="ctr"/>
           <a:lstStyle/>
           <a:p>
-            <a:pPr indent="0" marL="0">
+            <a:pPr marL="0" indent="0">
               <a:lnSpc>
                 <a:spcPct val="105000"/>
               </a:lnSpc>
@@ -10790,7 +11051,7 @@
           <a:bodyPr wrap="square" lIns="0" tIns="0" rIns="0" bIns="0" rtlCol="0" anchor="ctr"/>
           <a:lstStyle/>
           <a:p>
-            <a:pPr indent="0" marL="0">
+            <a:pPr marL="0" indent="0">
               <a:lnSpc>
                 <a:spcPct val="105000"/>
               </a:lnSpc>
@@ -10832,6 +11093,13 @@
           </a:solidFill>
           <a:ln/>
         </p:spPr>
+        <p:txBody>
+          <a:bodyPr/>
+          <a:lstStyle/>
+          <a:p>
+            <a:endParaRPr lang="es-PE"/>
+          </a:p>
+        </p:txBody>
       </p:sp>
       <p:sp>
         <p:nvSpPr>
@@ -10854,7 +11122,7 @@
           <a:bodyPr wrap="square" lIns="0" tIns="0" rIns="0" bIns="0" rtlCol="0" anchor="ctr"/>
           <a:lstStyle/>
           <a:p>
-            <a:pPr algn="ctr" indent="0" marL="0">
+            <a:pPr marL="0" indent="0" algn="ctr">
               <a:buNone/>
             </a:pPr>
             <a:r>
@@ -10893,6 +11161,13 @@
           </a:solidFill>
           <a:ln/>
         </p:spPr>
+        <p:txBody>
+          <a:bodyPr/>
+          <a:lstStyle/>
+          <a:p>
+            <a:endParaRPr lang="es-PE"/>
+          </a:p>
+        </p:txBody>
       </p:sp>
       <p:sp>
         <p:nvSpPr>
@@ -10917,6 +11192,13 @@
           </a:solidFill>
           <a:ln/>
         </p:spPr>
+        <p:txBody>
+          <a:bodyPr/>
+          <a:lstStyle/>
+          <a:p>
+            <a:endParaRPr lang="es-PE"/>
+          </a:p>
+        </p:txBody>
       </p:sp>
       <p:sp>
         <p:nvSpPr>
@@ -10939,7 +11221,7 @@
           <a:bodyPr wrap="square" lIns="0" tIns="0" rIns="0" bIns="0" rtlCol="0" anchor="ctr"/>
           <a:lstStyle/>
           <a:p>
-            <a:pPr algn="ctr" indent="0" marL="0">
+            <a:pPr marL="0" indent="0" algn="ctr">
               <a:buNone/>
             </a:pPr>
             <a:r>
@@ -10978,7 +11260,7 @@
           <a:bodyPr wrap="square" lIns="0" tIns="0" rIns="0" bIns="0" rtlCol="0" anchor="ctr"/>
           <a:lstStyle/>
           <a:p>
-            <a:pPr indent="0" marL="0">
+            <a:pPr marL="0" indent="0">
               <a:buNone/>
             </a:pPr>
             <a:r>
@@ -11017,7 +11299,7 @@
           <a:bodyPr wrap="square" lIns="0" tIns="0" rIns="0" bIns="0" rtlCol="0" anchor="ctr"/>
           <a:lstStyle/>
           <a:p>
-            <a:pPr indent="0" marL="0">
+            <a:pPr marL="0" indent="0">
               <a:buNone/>
             </a:pPr>
             <a:r>
@@ -11056,7 +11338,7 @@
           <a:bodyPr wrap="square" lIns="0" tIns="0" rIns="0" bIns="0" rtlCol="0" anchor="ctr"/>
           <a:lstStyle/>
           <a:p>
-            <a:pPr indent="0" marL="0">
+            <a:pPr marL="0" indent="0">
               <a:lnSpc>
                 <a:spcPct val="105000"/>
               </a:lnSpc>
@@ -11098,7 +11380,7 @@
           <a:bodyPr wrap="square" lIns="0" tIns="0" rIns="0" bIns="0" rtlCol="0" anchor="ctr"/>
           <a:lstStyle/>
           <a:p>
-            <a:pPr indent="0" marL="0">
+            <a:pPr marL="0" indent="0">
               <a:lnSpc>
                 <a:spcPct val="105000"/>
               </a:lnSpc>
@@ -11140,6 +11422,13 @@
           </a:solidFill>
           <a:ln/>
         </p:spPr>
+        <p:txBody>
+          <a:bodyPr/>
+          <a:lstStyle/>
+          <a:p>
+            <a:endParaRPr lang="es-PE"/>
+          </a:p>
+        </p:txBody>
       </p:sp>
       <p:sp>
         <p:nvSpPr>
@@ -11162,7 +11451,7 @@
           <a:bodyPr wrap="square" lIns="0" tIns="0" rIns="0" bIns="0" rtlCol="0" anchor="ctr"/>
           <a:lstStyle/>
           <a:p>
-            <a:pPr algn="ctr" indent="0" marL="0">
+            <a:pPr marL="0" indent="0" algn="ctr">
               <a:buNone/>
             </a:pPr>
             <a:r>
@@ -11201,6 +11490,13 @@
           </a:solidFill>
           <a:ln/>
         </p:spPr>
+        <p:txBody>
+          <a:bodyPr/>
+          <a:lstStyle/>
+          <a:p>
+            <a:endParaRPr lang="es-PE"/>
+          </a:p>
+        </p:txBody>
       </p:sp>
       <p:sp>
         <p:nvSpPr>
@@ -11225,6 +11521,13 @@
           </a:solidFill>
           <a:ln/>
         </p:spPr>
+        <p:txBody>
+          <a:bodyPr/>
+          <a:lstStyle/>
+          <a:p>
+            <a:endParaRPr lang="es-PE"/>
+          </a:p>
+        </p:txBody>
       </p:sp>
       <p:sp>
         <p:nvSpPr>
@@ -11247,7 +11550,7 @@
           <a:bodyPr wrap="square" lIns="0" tIns="0" rIns="0" bIns="0" rtlCol="0" anchor="ctr"/>
           <a:lstStyle/>
           <a:p>
-            <a:pPr algn="ctr" indent="0" marL="0">
+            <a:pPr marL="0" indent="0" algn="ctr">
               <a:buNone/>
             </a:pPr>
             <a:r>
@@ -11286,7 +11589,7 @@
           <a:bodyPr wrap="square" lIns="0" tIns="0" rIns="0" bIns="0" rtlCol="0" anchor="ctr"/>
           <a:lstStyle/>
           <a:p>
-            <a:pPr indent="0" marL="0">
+            <a:pPr marL="0" indent="0">
               <a:buNone/>
             </a:pPr>
             <a:r>
@@ -11325,7 +11628,7 @@
           <a:bodyPr wrap="square" lIns="0" tIns="0" rIns="0" bIns="0" rtlCol="0" anchor="ctr"/>
           <a:lstStyle/>
           <a:p>
-            <a:pPr indent="0" marL="0">
+            <a:pPr marL="0" indent="0">
               <a:buNone/>
             </a:pPr>
             <a:r>
@@ -11364,7 +11667,7 @@
           <a:bodyPr wrap="square" lIns="0" tIns="0" rIns="0" bIns="0" rtlCol="0" anchor="ctr"/>
           <a:lstStyle/>
           <a:p>
-            <a:pPr indent="0" marL="0">
+            <a:pPr marL="0" indent="0">
               <a:lnSpc>
                 <a:spcPct val="105000"/>
               </a:lnSpc>
@@ -11406,7 +11709,7 @@
           <a:bodyPr wrap="square" lIns="0" tIns="0" rIns="0" bIns="0" rtlCol="0" anchor="ctr"/>
           <a:lstStyle/>
           <a:p>
-            <a:pPr indent="0" marL="0">
+            <a:pPr marL="0" indent="0">
               <a:lnSpc>
                 <a:spcPct val="105000"/>
               </a:lnSpc>
@@ -11448,7 +11751,7 @@
           <a:bodyPr wrap="square" lIns="0" tIns="0" rIns="0" bIns="0" rtlCol="0" anchor="ctr"/>
           <a:lstStyle/>
           <a:p>
-            <a:pPr indent="0" marL="0">
+            <a:pPr marL="0" indent="0">
               <a:lnSpc>
                 <a:spcPct val="105000"/>
               </a:lnSpc>
@@ -11490,6 +11793,13 @@
           </a:solidFill>
           <a:ln/>
         </p:spPr>
+        <p:txBody>
+          <a:bodyPr/>
+          <a:lstStyle/>
+          <a:p>
+            <a:endParaRPr lang="es-PE"/>
+          </a:p>
+        </p:txBody>
       </p:sp>
       <p:sp>
         <p:nvSpPr>
@@ -11512,7 +11822,7 @@
           <a:bodyPr wrap="square" lIns="0" tIns="0" rIns="0" bIns="0" rtlCol="0" anchor="ctr"/>
           <a:lstStyle/>
           <a:p>
-            <a:pPr algn="ctr" indent="0" marL="0">
+            <a:pPr marL="0" indent="0" algn="ctr">
               <a:buNone/>
             </a:pPr>
             <a:r>
@@ -11551,7 +11861,7 @@
           <a:bodyPr wrap="square" lIns="0" tIns="0" rIns="0" bIns="0" rtlCol="0" anchor="ctr"/>
           <a:lstStyle/>
           <a:p>
-            <a:pPr indent="0" marL="0">
+            <a:pPr marL="0" indent="0">
               <a:buNone/>
             </a:pPr>
             <a:r>
@@ -11590,7 +11900,7 @@
           <a:bodyPr wrap="square" lIns="0" tIns="0" rIns="0" bIns="0" rtlCol="0" anchor="ctr"/>
           <a:lstStyle/>
           <a:p>
-            <a:pPr algn="r" indent="0" marL="0">
+            <a:pPr marL="0" indent="0" algn="r">
               <a:buNone/>
             </a:pPr>
             <a:r>
@@ -11624,6 +11934,7 @@
         <a:solidFill>
           <a:srgbClr val="0A1930"/>
         </a:solidFill>
+        <a:effectLst/>
       </p:bgPr>
     </p:bg>
     <p:spTree>
@@ -11661,11 +11972,11 @@
           <a:bodyPr wrap="square" lIns="0" tIns="0" rIns="0" bIns="0" rtlCol="0" anchor="ctr"/>
           <a:lstStyle/>
           <a:p>
-            <a:pPr indent="0" marL="0">
-              <a:buNone/>
-            </a:pPr>
-            <a:r>
-              <a:rPr lang="en-US" sz="1200" b="1" spc="200" kern="0" dirty="0">
+            <a:pPr marL="0" indent="0">
+              <a:buNone/>
+            </a:pPr>
+            <a:r>
+              <a:rPr lang="en-US" sz="1200" b="1" kern="0" spc="200" dirty="0">
                 <a:solidFill>
                   <a:srgbClr val="4FD1C5"/>
                 </a:solidFill>
@@ -11700,7 +12011,7 @@
           <a:bodyPr wrap="square" lIns="0" tIns="0" rIns="0" bIns="0" rtlCol="0" anchor="ctr"/>
           <a:lstStyle/>
           <a:p>
-            <a:pPr indent="0" marL="0">
+            <a:pPr marL="0" indent="0">
               <a:buNone/>
             </a:pPr>
             <a:r>
@@ -11739,6 +12050,13 @@
           </a:solidFill>
           <a:ln/>
         </p:spPr>
+        <p:txBody>
+          <a:bodyPr/>
+          <a:lstStyle/>
+          <a:p>
+            <a:endParaRPr lang="es-PE"/>
+          </a:p>
+        </p:txBody>
       </p:sp>
       <p:sp>
         <p:nvSpPr>
@@ -11763,6 +12081,13 @@
           </a:solidFill>
           <a:ln/>
         </p:spPr>
+        <p:txBody>
+          <a:bodyPr/>
+          <a:lstStyle/>
+          <a:p>
+            <a:endParaRPr lang="es-PE"/>
+          </a:p>
+        </p:txBody>
       </p:sp>
       <p:sp>
         <p:nvSpPr>
@@ -11785,7 +12110,7 @@
           <a:bodyPr wrap="square" lIns="0" tIns="0" rIns="0" bIns="0" rtlCol="0" anchor="ctr"/>
           <a:lstStyle/>
           <a:p>
-            <a:pPr algn="ctr" indent="0" marL="0">
+            <a:pPr marL="0" indent="0" algn="ctr">
               <a:buNone/>
             </a:pPr>
             <a:r>
@@ -11824,7 +12149,7 @@
           <a:bodyPr wrap="square" lIns="0" tIns="0" rIns="0" bIns="0" rtlCol="0" anchor="ctr"/>
           <a:lstStyle/>
           <a:p>
-            <a:pPr indent="0" marL="0">
+            <a:pPr marL="0" indent="0">
               <a:buNone/>
             </a:pPr>
             <a:r>
@@ -11863,6 +12188,13 @@
           </a:solidFill>
           <a:ln/>
         </p:spPr>
+        <p:txBody>
+          <a:bodyPr/>
+          <a:lstStyle/>
+          <a:p>
+            <a:endParaRPr lang="es-PE"/>
+          </a:p>
+        </p:txBody>
       </p:sp>
       <p:sp>
         <p:nvSpPr>
@@ -11885,7 +12217,7 @@
           <a:bodyPr wrap="square" lIns="0" tIns="0" rIns="0" bIns="0" rtlCol="0" anchor="ctr"/>
           <a:lstStyle/>
           <a:p>
-            <a:pPr indent="0" marL="0">
+            <a:pPr marL="0" indent="0">
               <a:buNone/>
             </a:pPr>
             <a:r>
@@ -11924,7 +12256,7 @@
           <a:bodyPr wrap="square" lIns="0" tIns="0" rIns="0" bIns="0" rtlCol="0" anchor="ctr"/>
           <a:lstStyle/>
           <a:p>
-            <a:pPr indent="0" marL="0">
+            <a:pPr marL="0" indent="0">
               <a:buNone/>
             </a:pPr>
             <a:r>
@@ -11963,6 +12295,13 @@
           </a:solidFill>
           <a:ln/>
         </p:spPr>
+        <p:txBody>
+          <a:bodyPr/>
+          <a:lstStyle/>
+          <a:p>
+            <a:endParaRPr lang="es-PE"/>
+          </a:p>
+        </p:txBody>
       </p:sp>
       <p:sp>
         <p:nvSpPr>
@@ -11985,7 +12324,7 @@
           <a:bodyPr wrap="square" lIns="0" tIns="0" rIns="0" bIns="0" rtlCol="0" anchor="ctr"/>
           <a:lstStyle/>
           <a:p>
-            <a:pPr indent="0" marL="0">
+            <a:pPr marL="0" indent="0">
               <a:buNone/>
             </a:pPr>
             <a:r>
@@ -12024,7 +12363,7 @@
           <a:bodyPr wrap="square" lIns="0" tIns="0" rIns="0" bIns="0" rtlCol="0" anchor="ctr"/>
           <a:lstStyle/>
           <a:p>
-            <a:pPr indent="0" marL="0">
+            <a:pPr marL="0" indent="0">
               <a:buNone/>
             </a:pPr>
             <a:r>
@@ -12063,6 +12402,13 @@
           </a:solidFill>
           <a:ln/>
         </p:spPr>
+        <p:txBody>
+          <a:bodyPr/>
+          <a:lstStyle/>
+          <a:p>
+            <a:endParaRPr lang="es-PE"/>
+          </a:p>
+        </p:txBody>
       </p:sp>
       <p:sp>
         <p:nvSpPr>
@@ -12085,7 +12431,7 @@
           <a:bodyPr wrap="square" lIns="0" tIns="0" rIns="0" bIns="0" rtlCol="0" anchor="ctr"/>
           <a:lstStyle/>
           <a:p>
-            <a:pPr indent="0" marL="0">
+            <a:pPr marL="0" indent="0">
               <a:buNone/>
             </a:pPr>
             <a:r>
@@ -12124,7 +12470,7 @@
           <a:bodyPr wrap="square" lIns="0" tIns="0" rIns="0" bIns="0" rtlCol="0" anchor="ctr"/>
           <a:lstStyle/>
           <a:p>
-            <a:pPr indent="0" marL="0">
+            <a:pPr marL="0" indent="0">
               <a:buNone/>
             </a:pPr>
             <a:r>
@@ -12163,6 +12509,13 @@
           </a:solidFill>
           <a:ln/>
         </p:spPr>
+        <p:txBody>
+          <a:bodyPr/>
+          <a:lstStyle/>
+          <a:p>
+            <a:endParaRPr lang="es-PE"/>
+          </a:p>
+        </p:txBody>
       </p:sp>
       <p:sp>
         <p:nvSpPr>
@@ -12187,6 +12540,13 @@
           </a:solidFill>
           <a:ln/>
         </p:spPr>
+        <p:txBody>
+          <a:bodyPr/>
+          <a:lstStyle/>
+          <a:p>
+            <a:endParaRPr lang="es-PE"/>
+          </a:p>
+        </p:txBody>
       </p:sp>
       <p:sp>
         <p:nvSpPr>
@@ -12209,7 +12569,7 @@
           <a:bodyPr wrap="square" lIns="0" tIns="0" rIns="0" bIns="0" rtlCol="0" anchor="ctr"/>
           <a:lstStyle/>
           <a:p>
-            <a:pPr algn="ctr" indent="0" marL="0">
+            <a:pPr marL="0" indent="0" algn="ctr">
               <a:buNone/>
             </a:pPr>
             <a:r>
@@ -12248,7 +12608,7 @@
           <a:bodyPr wrap="square" lIns="0" tIns="0" rIns="0" bIns="0" rtlCol="0" anchor="ctr"/>
           <a:lstStyle/>
           <a:p>
-            <a:pPr indent="0" marL="0">
+            <a:pPr marL="0" indent="0">
               <a:buNone/>
             </a:pPr>
             <a:r>
@@ -12287,7 +12647,7 @@
           <a:bodyPr wrap="square" lIns="0" tIns="0" rIns="0" bIns="0" rtlCol="0" anchor="ctr"/>
           <a:lstStyle/>
           <a:p>
-            <a:pPr indent="0" marL="0">
+            <a:pPr marL="0" indent="0">
               <a:lnSpc>
                 <a:spcPct val="120000"/>
               </a:lnSpc>
@@ -12329,6 +12689,13 @@
           </a:solidFill>
           <a:ln/>
         </p:spPr>
+        <p:txBody>
+          <a:bodyPr/>
+          <a:lstStyle/>
+          <a:p>
+            <a:endParaRPr lang="es-PE"/>
+          </a:p>
+        </p:txBody>
       </p:sp>
       <p:sp>
         <p:nvSpPr>
@@ -12351,7 +12718,7 @@
           <a:bodyPr wrap="square" lIns="0" tIns="0" rIns="0" bIns="0" rtlCol="0" anchor="ctr"/>
           <a:lstStyle/>
           <a:p>
-            <a:pPr indent="0" marL="0">
+            <a:pPr marL="0" indent="0">
               <a:buNone/>
             </a:pPr>
             <a:r>
@@ -12390,7 +12757,7 @@
           <a:bodyPr wrap="square" lIns="0" tIns="0" rIns="0" bIns="0" rtlCol="0" anchor="ctr"/>
           <a:lstStyle/>
           <a:p>
-            <a:pPr indent="0" marL="0">
+            <a:pPr marL="0" indent="0">
               <a:buNone/>
             </a:pPr>
             <a:r>
@@ -12429,6 +12796,13 @@
           </a:solidFill>
           <a:ln/>
         </p:spPr>
+        <p:txBody>
+          <a:bodyPr/>
+          <a:lstStyle/>
+          <a:p>
+            <a:endParaRPr lang="es-PE"/>
+          </a:p>
+        </p:txBody>
       </p:sp>
       <p:sp>
         <p:nvSpPr>
@@ -12451,7 +12825,7 @@
           <a:bodyPr wrap="square" lIns="0" tIns="0" rIns="0" bIns="0" rtlCol="0" anchor="ctr"/>
           <a:lstStyle/>
           <a:p>
-            <a:pPr indent="0" marL="0">
+            <a:pPr marL="0" indent="0">
               <a:buNone/>
             </a:pPr>
             <a:r>
@@ -12490,7 +12864,7 @@
           <a:bodyPr wrap="square" lIns="0" tIns="0" rIns="0" bIns="0" rtlCol="0" anchor="ctr"/>
           <a:lstStyle/>
           <a:p>
-            <a:pPr indent="0" marL="0">
+            <a:pPr marL="0" indent="0">
               <a:buNone/>
             </a:pPr>
             <a:r>
@@ -12529,7 +12903,7 @@
           <a:bodyPr wrap="square" lIns="0" tIns="0" rIns="0" bIns="0" rtlCol="0" anchor="ctr"/>
           <a:lstStyle/>
           <a:p>
-            <a:pPr algn="r" indent="0" marL="0">
+            <a:pPr marL="0" indent="0" algn="r">
               <a:buNone/>
             </a:pPr>
             <a:r>
@@ -12563,6 +12937,7 @@
         <a:solidFill>
           <a:srgbClr val="0A1930"/>
         </a:solidFill>
+        <a:effectLst/>
       </p:bgPr>
     </p:bg>
     <p:spTree>
@@ -12600,11 +12975,11 @@
           <a:bodyPr wrap="square" lIns="0" tIns="0" rIns="0" bIns="0" rtlCol="0" anchor="ctr"/>
           <a:lstStyle/>
           <a:p>
-            <a:pPr indent="0" marL="0">
-              <a:buNone/>
-            </a:pPr>
-            <a:r>
-              <a:rPr lang="en-US" sz="1200" b="1" spc="200" kern="0" dirty="0">
+            <a:pPr marL="0" indent="0">
+              <a:buNone/>
+            </a:pPr>
+            <a:r>
+              <a:rPr lang="en-US" sz="1200" b="1" kern="0" spc="200" dirty="0">
                 <a:solidFill>
                   <a:srgbClr val="4FD1C5"/>
                 </a:solidFill>
@@ -12639,7 +13014,7 @@
           <a:bodyPr wrap="square" lIns="0" tIns="0" rIns="0" bIns="0" rtlCol="0" anchor="ctr"/>
           <a:lstStyle/>
           <a:p>
-            <a:pPr indent="0" marL="0">
+            <a:pPr marL="0" indent="0">
               <a:buNone/>
             </a:pPr>
             <a:r>
@@ -12680,10 +13055,34 @@
             <a:tbl>
               <a:tblPr/>
               <a:tblGrid>
-                <a:gridCol w="3017520"/>
-                <a:gridCol w="2286000"/>
-                <a:gridCol w="2286000"/>
-                <a:gridCol w="3474720"/>
+                <a:gridCol w="3017520">
+                  <a:extLst>
+                    <a:ext uri="{9D8B030D-6E8A-4147-A177-3AD203B41FA5}">
+                      <a16:colId xmlns:a16="http://schemas.microsoft.com/office/drawing/2014/main" val="20000"/>
+                    </a:ext>
+                  </a:extLst>
+                </a:gridCol>
+                <a:gridCol w="2286000">
+                  <a:extLst>
+                    <a:ext uri="{9D8B030D-6E8A-4147-A177-3AD203B41FA5}">
+                      <a16:colId xmlns:a16="http://schemas.microsoft.com/office/drawing/2014/main" val="20001"/>
+                    </a:ext>
+                  </a:extLst>
+                </a:gridCol>
+                <a:gridCol w="2286000">
+                  <a:extLst>
+                    <a:ext uri="{9D8B030D-6E8A-4147-A177-3AD203B41FA5}">
+                      <a16:colId xmlns:a16="http://schemas.microsoft.com/office/drawing/2014/main" val="20002"/>
+                    </a:ext>
+                  </a:extLst>
+                </a:gridCol>
+                <a:gridCol w="3474720">
+                  <a:extLst>
+                    <a:ext uri="{9D8B030D-6E8A-4147-A177-3AD203B41FA5}">
+                      <a16:colId xmlns:a16="http://schemas.microsoft.com/office/drawing/2014/main" val="20003"/>
+                    </a:ext>
+                  </a:extLst>
+                </a:gridCol>
               </a:tblGrid>
               <a:tr h="543560">
                 <a:tc>
@@ -12691,7 +13090,7 @@
                     <a:bodyPr/>
                     <a:lstStyle/>
                     <a:p>
-                      <a:pPr indent="0" marL="0">
+                      <a:pPr marL="0" indent="0">
                         <a:buNone/>
                       </a:pPr>
                       <a:r>
@@ -12759,7 +13158,7 @@
                     <a:bodyPr/>
                     <a:lstStyle/>
                     <a:p>
-                      <a:pPr indent="0" marL="0">
+                      <a:pPr marL="0" indent="0">
                         <a:buNone/>
                       </a:pPr>
                       <a:r>
@@ -12827,7 +13226,7 @@
                     <a:bodyPr/>
                     <a:lstStyle/>
                     <a:p>
-                      <a:pPr indent="0" marL="0">
+                      <a:pPr marL="0" indent="0">
                         <a:buNone/>
                       </a:pPr>
                       <a:r>
@@ -12895,7 +13294,7 @@
                     <a:bodyPr/>
                     <a:lstStyle/>
                     <a:p>
-                      <a:pPr indent="0" marL="0">
+                      <a:pPr marL="0" indent="0">
                         <a:buNone/>
                       </a:pPr>
                       <a:r>
@@ -12958,6 +13357,11 @@
                     </a:solidFill>
                   </a:tcPr>
                 </a:tc>
+                <a:extLst>
+                  <a:ext uri="{0D108BD9-81ED-4DB2-BD59-A6C34878D82A}">
+                    <a16:rowId xmlns:a16="http://schemas.microsoft.com/office/drawing/2014/main" val="10000"/>
+                  </a:ext>
+                </a:extLst>
               </a:tr>
               <a:tr h="543560">
                 <a:tc>
@@ -12965,7 +13369,7 @@
                     <a:bodyPr/>
                     <a:lstStyle/>
                     <a:p>
-                      <a:pPr indent="0" marL="0">
+                      <a:pPr marL="0" indent="0">
                         <a:buNone/>
                       </a:pPr>
                       <a:r>
@@ -13033,7 +13437,7 @@
                     <a:bodyPr/>
                     <a:lstStyle/>
                     <a:p>
-                      <a:pPr indent="0" marL="0">
+                      <a:pPr marL="0" indent="0">
                         <a:buNone/>
                       </a:pPr>
                       <a:r>
@@ -13101,7 +13505,7 @@
                     <a:bodyPr/>
                     <a:lstStyle/>
                     <a:p>
-                      <a:pPr indent="0" marL="0">
+                      <a:pPr marL="0" indent="0">
                         <a:buNone/>
                       </a:pPr>
                       <a:r>
@@ -13169,7 +13573,7 @@
                     <a:bodyPr/>
                     <a:lstStyle/>
                     <a:p>
-                      <a:pPr indent="0" marL="0">
+                      <a:pPr marL="0" indent="0">
                         <a:buNone/>
                       </a:pPr>
                       <a:r>
@@ -13232,6 +13636,11 @@
                     </a:solidFill>
                   </a:tcPr>
                 </a:tc>
+                <a:extLst>
+                  <a:ext uri="{0D108BD9-81ED-4DB2-BD59-A6C34878D82A}">
+                    <a16:rowId xmlns:a16="http://schemas.microsoft.com/office/drawing/2014/main" val="10001"/>
+                  </a:ext>
+                </a:extLst>
               </a:tr>
               <a:tr h="543560">
                 <a:tc>
@@ -13239,7 +13648,7 @@
                     <a:bodyPr/>
                     <a:lstStyle/>
                     <a:p>
-                      <a:pPr indent="0" marL="0">
+                      <a:pPr marL="0" indent="0">
                         <a:buNone/>
                       </a:pPr>
                       <a:r>
@@ -13307,7 +13716,7 @@
                     <a:bodyPr/>
                     <a:lstStyle/>
                     <a:p>
-                      <a:pPr indent="0" marL="0">
+                      <a:pPr marL="0" indent="0">
                         <a:buNone/>
                       </a:pPr>
                       <a:r>
@@ -13375,7 +13784,7 @@
                     <a:bodyPr/>
                     <a:lstStyle/>
                     <a:p>
-                      <a:pPr indent="0" marL="0">
+                      <a:pPr marL="0" indent="0">
                         <a:buNone/>
                       </a:pPr>
                       <a:r>
@@ -13443,7 +13852,7 @@
                     <a:bodyPr/>
                     <a:lstStyle/>
                     <a:p>
-                      <a:pPr indent="0" marL="0">
+                      <a:pPr marL="0" indent="0">
                         <a:buNone/>
                       </a:pPr>
                       <a:r>
@@ -13506,6 +13915,11 @@
                     </a:solidFill>
                   </a:tcPr>
                 </a:tc>
+                <a:extLst>
+                  <a:ext uri="{0D108BD9-81ED-4DB2-BD59-A6C34878D82A}">
+                    <a16:rowId xmlns:a16="http://schemas.microsoft.com/office/drawing/2014/main" val="10002"/>
+                  </a:ext>
+                </a:extLst>
               </a:tr>
               <a:tr h="543560">
                 <a:tc>
@@ -13513,7 +13927,7 @@
                     <a:bodyPr/>
                     <a:lstStyle/>
                     <a:p>
-                      <a:pPr indent="0" marL="0">
+                      <a:pPr marL="0" indent="0">
                         <a:buNone/>
                       </a:pPr>
                       <a:r>
@@ -13581,7 +13995,7 @@
                     <a:bodyPr/>
                     <a:lstStyle/>
                     <a:p>
-                      <a:pPr indent="0" marL="0">
+                      <a:pPr marL="0" indent="0">
                         <a:buNone/>
                       </a:pPr>
                       <a:r>
@@ -13649,7 +14063,7 @@
                     <a:bodyPr/>
                     <a:lstStyle/>
                     <a:p>
-                      <a:pPr indent="0" marL="0">
+                      <a:pPr marL="0" indent="0">
                         <a:buNone/>
                       </a:pPr>
                       <a:r>
@@ -13717,7 +14131,7 @@
                     <a:bodyPr/>
                     <a:lstStyle/>
                     <a:p>
-                      <a:pPr indent="0" marL="0">
+                      <a:pPr marL="0" indent="0">
                         <a:buNone/>
                       </a:pPr>
                       <a:r>
@@ -13780,6 +14194,11 @@
                     </a:solidFill>
                   </a:tcPr>
                 </a:tc>
+                <a:extLst>
+                  <a:ext uri="{0D108BD9-81ED-4DB2-BD59-A6C34878D82A}">
+                    <a16:rowId xmlns:a16="http://schemas.microsoft.com/office/drawing/2014/main" val="10003"/>
+                  </a:ext>
+                </a:extLst>
               </a:tr>
               <a:tr h="543560">
                 <a:tc>
@@ -13787,7 +14206,7 @@
                     <a:bodyPr/>
                     <a:lstStyle/>
                     <a:p>
-                      <a:pPr indent="0" marL="0">
+                      <a:pPr marL="0" indent="0">
                         <a:buNone/>
                       </a:pPr>
                       <a:r>
@@ -13855,7 +14274,7 @@
                     <a:bodyPr/>
                     <a:lstStyle/>
                     <a:p>
-                      <a:pPr indent="0" marL="0">
+                      <a:pPr marL="0" indent="0">
                         <a:buNone/>
                       </a:pPr>
                       <a:r>
@@ -13923,7 +14342,7 @@
                     <a:bodyPr/>
                     <a:lstStyle/>
                     <a:p>
-                      <a:pPr indent="0" marL="0">
+                      <a:pPr marL="0" indent="0">
                         <a:buNone/>
                       </a:pPr>
                       <a:r>
@@ -13991,7 +14410,7 @@
                     <a:bodyPr/>
                     <a:lstStyle/>
                     <a:p>
-                      <a:pPr indent="0" marL="0">
+                      <a:pPr marL="0" indent="0">
                         <a:buNone/>
                       </a:pPr>
                       <a:r>
@@ -14054,6 +14473,11 @@
                     </a:solidFill>
                   </a:tcPr>
                 </a:tc>
+                <a:extLst>
+                  <a:ext uri="{0D108BD9-81ED-4DB2-BD59-A6C34878D82A}">
+                    <a16:rowId xmlns:a16="http://schemas.microsoft.com/office/drawing/2014/main" val="10004"/>
+                  </a:ext>
+                </a:extLst>
               </a:tr>
               <a:tr h="543560">
                 <a:tc>
@@ -14061,7 +14485,7 @@
                     <a:bodyPr/>
                     <a:lstStyle/>
                     <a:p>
-                      <a:pPr indent="0" marL="0">
+                      <a:pPr marL="0" indent="0">
                         <a:buNone/>
                       </a:pPr>
                       <a:r>
@@ -14129,7 +14553,7 @@
                     <a:bodyPr/>
                     <a:lstStyle/>
                     <a:p>
-                      <a:pPr indent="0" marL="0">
+                      <a:pPr marL="0" indent="0">
                         <a:buNone/>
                       </a:pPr>
                       <a:r>
@@ -14197,7 +14621,7 @@
                     <a:bodyPr/>
                     <a:lstStyle/>
                     <a:p>
-                      <a:pPr indent="0" marL="0">
+                      <a:pPr marL="0" indent="0">
                         <a:buNone/>
                       </a:pPr>
                       <a:r>
@@ -14265,7 +14689,7 @@
                     <a:bodyPr/>
                     <a:lstStyle/>
                     <a:p>
-                      <a:pPr indent="0" marL="0">
+                      <a:pPr marL="0" indent="0">
                         <a:buNone/>
                       </a:pPr>
                       <a:r>
@@ -14328,6 +14752,11 @@
                     </a:solidFill>
                   </a:tcPr>
                 </a:tc>
+                <a:extLst>
+                  <a:ext uri="{0D108BD9-81ED-4DB2-BD59-A6C34878D82A}">
+                    <a16:rowId xmlns:a16="http://schemas.microsoft.com/office/drawing/2014/main" val="10005"/>
+                  </a:ext>
+                </a:extLst>
               </a:tr>
               <a:tr h="543560">
                 <a:tc>
@@ -14335,7 +14764,7 @@
                     <a:bodyPr/>
                     <a:lstStyle/>
                     <a:p>
-                      <a:pPr indent="0" marL="0">
+                      <a:pPr marL="0" indent="0">
                         <a:buNone/>
                       </a:pPr>
                       <a:r>
@@ -14403,7 +14832,7 @@
                     <a:bodyPr/>
                     <a:lstStyle/>
                     <a:p>
-                      <a:pPr indent="0" marL="0">
+                      <a:pPr marL="0" indent="0">
                         <a:buNone/>
                       </a:pPr>
                       <a:r>
@@ -14471,7 +14900,7 @@
                     <a:bodyPr/>
                     <a:lstStyle/>
                     <a:p>
-                      <a:pPr indent="0" marL="0">
+                      <a:pPr marL="0" indent="0">
                         <a:buNone/>
                       </a:pPr>
                       <a:r>
@@ -14539,7 +14968,7 @@
                     <a:bodyPr/>
                     <a:lstStyle/>
                     <a:p>
-                      <a:pPr indent="0" marL="0">
+                      <a:pPr marL="0" indent="0">
                         <a:buNone/>
                       </a:pPr>
                       <a:r>
@@ -14602,6 +15031,11 @@
                     </a:solidFill>
                   </a:tcPr>
                 </a:tc>
+                <a:extLst>
+                  <a:ext uri="{0D108BD9-81ED-4DB2-BD59-A6C34878D82A}">
+                    <a16:rowId xmlns:a16="http://schemas.microsoft.com/office/drawing/2014/main" val="10006"/>
+                  </a:ext>
+                </a:extLst>
               </a:tr>
               <a:tr h="543560">
                 <a:tc>
@@ -14609,7 +15043,7 @@
                     <a:bodyPr/>
                     <a:lstStyle/>
                     <a:p>
-                      <a:pPr indent="0" marL="0">
+                      <a:pPr marL="0" indent="0">
                         <a:buNone/>
                       </a:pPr>
                       <a:r>
@@ -14677,7 +15111,7 @@
                     <a:bodyPr/>
                     <a:lstStyle/>
                     <a:p>
-                      <a:pPr indent="0" marL="0">
+                      <a:pPr marL="0" indent="0">
                         <a:buNone/>
                       </a:pPr>
                       <a:r>
@@ -14745,7 +15179,7 @@
                     <a:bodyPr/>
                     <a:lstStyle/>
                     <a:p>
-                      <a:pPr indent="0" marL="0">
+                      <a:pPr marL="0" indent="0">
                         <a:buNone/>
                       </a:pPr>
                       <a:r>
@@ -14813,7 +15247,7 @@
                     <a:bodyPr/>
                     <a:lstStyle/>
                     <a:p>
-                      <a:pPr indent="0" marL="0">
+                      <a:pPr marL="0" indent="0">
                         <a:buNone/>
                       </a:pPr>
                       <a:r>
@@ -14876,6 +15310,11 @@
                     </a:solidFill>
                   </a:tcPr>
                 </a:tc>
+                <a:extLst>
+                  <a:ext uri="{0D108BD9-81ED-4DB2-BD59-A6C34878D82A}">
+                    <a16:rowId xmlns:a16="http://schemas.microsoft.com/office/drawing/2014/main" val="10007"/>
+                  </a:ext>
+                </a:extLst>
               </a:tr>
               <a:tr h="543560">
                 <a:tc>
@@ -14883,7 +15322,7 @@
                     <a:bodyPr/>
                     <a:lstStyle/>
                     <a:p>
-                      <a:pPr indent="0" marL="0">
+                      <a:pPr marL="0" indent="0">
                         <a:buNone/>
                       </a:pPr>
                       <a:r>
@@ -14951,7 +15390,7 @@
                     <a:bodyPr/>
                     <a:lstStyle/>
                     <a:p>
-                      <a:pPr indent="0" marL="0">
+                      <a:pPr marL="0" indent="0">
                         <a:buNone/>
                       </a:pPr>
                       <a:r>
@@ -15019,7 +15458,7 @@
                     <a:bodyPr/>
                     <a:lstStyle/>
                     <a:p>
-                      <a:pPr indent="0" marL="0">
+                      <a:pPr marL="0" indent="0">
                         <a:buNone/>
                       </a:pPr>
                       <a:r>
@@ -15087,7 +15526,7 @@
                     <a:bodyPr/>
                     <a:lstStyle/>
                     <a:p>
-                      <a:pPr indent="0" marL="0">
+                      <a:pPr marL="0" indent="0">
                         <a:buNone/>
                       </a:pPr>
                       <a:r>
@@ -15150,6 +15589,11 @@
                     </a:solidFill>
                   </a:tcPr>
                 </a:tc>
+                <a:extLst>
+                  <a:ext uri="{0D108BD9-81ED-4DB2-BD59-A6C34878D82A}">
+                    <a16:rowId xmlns:a16="http://schemas.microsoft.com/office/drawing/2014/main" val="10008"/>
+                  </a:ext>
+                </a:extLst>
               </a:tr>
             </a:tbl>
           </a:graphicData>
@@ -15176,7 +15620,7 @@
           <a:bodyPr wrap="square" lIns="0" tIns="0" rIns="0" bIns="0" rtlCol="0" anchor="ctr"/>
           <a:lstStyle/>
           <a:p>
-            <a:pPr algn="r" indent="0" marL="0">
+            <a:pPr marL="0" indent="0" algn="r">
               <a:buNone/>
             </a:pPr>
             <a:r>
@@ -15495,4 +15939,319 @@
     </a:ext>
   </a:extLst>
 </a:theme>
+</file>
+
+<file path=ppt/theme/theme2.xml><?xml version="1.0" encoding="utf-8"?>
+<a:theme xmlns:a="http://schemas.openxmlformats.org/drawingml/2006/main" name="Office Theme">
+  <a:themeElements>
+    <a:clrScheme name="Office">
+      <a:dk1>
+        <a:sysClr val="windowText" lastClr="000000"/>
+      </a:dk1>
+      <a:lt1>
+        <a:sysClr val="window" lastClr="FFFFFF"/>
+      </a:lt1>
+      <a:dk2>
+        <a:srgbClr val="0E2841"/>
+      </a:dk2>
+      <a:lt2>
+        <a:srgbClr val="E8E8E8"/>
+      </a:lt2>
+      <a:accent1>
+        <a:srgbClr val="156082"/>
+      </a:accent1>
+      <a:accent2>
+        <a:srgbClr val="E97132"/>
+      </a:accent2>
+      <a:accent3>
+        <a:srgbClr val="196B24"/>
+      </a:accent3>
+      <a:accent4>
+        <a:srgbClr val="0F9ED5"/>
+      </a:accent4>
+      <a:accent5>
+        <a:srgbClr val="A02B93"/>
+      </a:accent5>
+      <a:accent6>
+        <a:srgbClr val="4EA72E"/>
+      </a:accent6>
+      <a:hlink>
+        <a:srgbClr val="467886"/>
+      </a:hlink>
+      <a:folHlink>
+        <a:srgbClr val="96607D"/>
+      </a:folHlink>
+    </a:clrScheme>
+    <a:fontScheme name="Office">
+      <a:majorFont>
+        <a:latin typeface="Aptos Display" panose="02110004020202020204"/>
+        <a:ea typeface=""/>
+        <a:cs typeface=""/>
+        <a:font script="Jpan" typeface="游ゴシック Light"/>
+        <a:font script="Hang" typeface="맑은 고딕"/>
+        <a:font script="Hans" typeface="等线 Light"/>
+        <a:font script="Hant" typeface="新細明體"/>
+        <a:font script="Arab" typeface="Times New Roman"/>
+        <a:font script="Hebr" typeface="Times New Roman"/>
+        <a:font script="Thai" typeface="Angsana New"/>
+        <a:font script="Ethi" typeface="Nyala"/>
+        <a:font script="Beng" typeface="Vrinda"/>
+        <a:font script="Gujr" typeface="Shruti"/>
+        <a:font script="Khmr" typeface="MoolBoran"/>
+        <a:font script="Knda" typeface="Tunga"/>
+        <a:font script="Guru" typeface="Raavi"/>
+        <a:font script="Cans" typeface="Euphemia"/>
+        <a:font script="Cher" typeface="Plantagenet Cherokee"/>
+        <a:font script="Yiii" typeface="Microsoft Yi Baiti"/>
+        <a:font script="Tibt" typeface="Microsoft Himalaya"/>
+        <a:font script="Thaa" typeface="MV Boli"/>
+        <a:font script="Deva" typeface="Mangal"/>
+        <a:font script="Telu" typeface="Gautami"/>
+        <a:font script="Taml" typeface="Latha"/>
+        <a:font script="Syrc" typeface="Estrangelo Edessa"/>
+        <a:font script="Orya" typeface="Kalinga"/>
+        <a:font script="Mlym" typeface="Kartika"/>
+        <a:font script="Laoo" typeface="DokChampa"/>
+        <a:font script="Sinh" typeface="Iskoola Pota"/>
+        <a:font script="Mong" typeface="Mongolian Baiti"/>
+        <a:font script="Viet" typeface="Times New Roman"/>
+        <a:font script="Uigh" typeface="Microsoft Uighur"/>
+        <a:font script="Geor" typeface="Sylfaen"/>
+        <a:font script="Armn" typeface="Arial"/>
+        <a:font script="Bugi" typeface="Leelawadee UI"/>
+        <a:font script="Bopo" typeface="Microsoft JhengHei"/>
+        <a:font script="Java" typeface="Javanese Text"/>
+        <a:font script="Lisu" typeface="Segoe UI"/>
+        <a:font script="Mymr" typeface="Myanmar Text"/>
+        <a:font script="Nkoo" typeface="Ebrima"/>
+        <a:font script="Olck" typeface="Nirmala UI"/>
+        <a:font script="Osma" typeface="Ebrima"/>
+        <a:font script="Phag" typeface="Phagspa"/>
+        <a:font script="Syrn" typeface="Estrangelo Edessa"/>
+        <a:font script="Syrj" typeface="Estrangelo Edessa"/>
+        <a:font script="Syre" typeface="Estrangelo Edessa"/>
+        <a:font script="Sora" typeface="Nirmala UI"/>
+        <a:font script="Tale" typeface="Microsoft Tai Le"/>
+        <a:font script="Talu" typeface="Microsoft New Tai Lue"/>
+        <a:font script="Tfng" typeface="Ebrima"/>
+      </a:majorFont>
+      <a:minorFont>
+        <a:latin typeface="Aptos" panose="02110004020202020204"/>
+        <a:ea typeface=""/>
+        <a:cs typeface=""/>
+        <a:font script="Jpan" typeface="游ゴシック"/>
+        <a:font script="Hang" typeface="맑은 고딕"/>
+        <a:font script="Hans" typeface="等线"/>
+        <a:font script="Hant" typeface="新細明體"/>
+        <a:font script="Arab" typeface="Arial"/>
+        <a:font script="Hebr" typeface="Arial"/>
+        <a:font script="Thai" typeface="Cordia New"/>
+        <a:font script="Ethi" typeface="Nyala"/>
+        <a:font script="Beng" typeface="Vrinda"/>
+        <a:font script="Gujr" typeface="Shruti"/>
+        <a:font script="Khmr" typeface="DaunPenh"/>
+        <a:font script="Knda" typeface="Tunga"/>
+        <a:font script="Guru" typeface="Raavi"/>
+        <a:font script="Cans" typeface="Euphemia"/>
+        <a:font script="Cher" typeface="Plantagenet Cherokee"/>
+        <a:font script="Yiii" typeface="Microsoft Yi Baiti"/>
+        <a:font script="Tibt" typeface="Microsoft Himalaya"/>
+        <a:font script="Thaa" typeface="MV Boli"/>
+        <a:font script="Deva" typeface="Mangal"/>
+        <a:font script="Telu" typeface="Gautami"/>
+        <a:font script="Taml" typeface="Latha"/>
+        <a:font script="Syrc" typeface="Estrangelo Edessa"/>
+        <a:font script="Orya" typeface="Kalinga"/>
+        <a:font script="Mlym" typeface="Kartika"/>
+        <a:font script="Laoo" typeface="DokChampa"/>
+        <a:font script="Sinh" typeface="Iskoola Pota"/>
+        <a:font script="Mong" typeface="Mongolian Baiti"/>
+        <a:font script="Viet" typeface="Arial"/>
+        <a:font script="Uigh" typeface="Microsoft Uighur"/>
+        <a:font script="Geor" typeface="Sylfaen"/>
+        <a:font script="Armn" typeface="Arial"/>
+        <a:font script="Bugi" typeface="Leelawadee UI"/>
+        <a:font script="Bopo" typeface="Microsoft JhengHei"/>
+        <a:font script="Java" typeface="Javanese Text"/>
+        <a:font script="Lisu" typeface="Segoe UI"/>
+        <a:font script="Mymr" typeface="Myanmar Text"/>
+        <a:font script="Nkoo" typeface="Ebrima"/>
+        <a:font script="Olck" typeface="Nirmala UI"/>
+        <a:font script="Osma" typeface="Ebrima"/>
+        <a:font script="Phag" typeface="Phagspa"/>
+        <a:font script="Syrn" typeface="Estrangelo Edessa"/>
+        <a:font script="Syrj" typeface="Estrangelo Edessa"/>
+        <a:font script="Syre" typeface="Estrangelo Edessa"/>
+        <a:font script="Sora" typeface="Nirmala UI"/>
+        <a:font script="Tale" typeface="Microsoft Tai Le"/>
+        <a:font script="Talu" typeface="Microsoft New Tai Lue"/>
+        <a:font script="Tfng" typeface="Ebrima"/>
+      </a:minorFont>
+    </a:fontScheme>
+    <a:fmtScheme name="Office">
+      <a:fillStyleLst>
+        <a:solidFill>
+          <a:schemeClr val="phClr"/>
+        </a:solidFill>
+        <a:gradFill rotWithShape="1">
+          <a:gsLst>
+            <a:gs pos="0">
+              <a:schemeClr val="phClr">
+                <a:lumMod val="110000"/>
+                <a:satMod val="105000"/>
+                <a:tint val="67000"/>
+              </a:schemeClr>
+            </a:gs>
+            <a:gs pos="50000">
+              <a:schemeClr val="phClr">
+                <a:lumMod val="105000"/>
+                <a:satMod val="103000"/>
+                <a:tint val="73000"/>
+              </a:schemeClr>
+            </a:gs>
+            <a:gs pos="100000">
+              <a:schemeClr val="phClr">
+                <a:lumMod val="105000"/>
+                <a:satMod val="109000"/>
+                <a:tint val="81000"/>
+              </a:schemeClr>
+            </a:gs>
+          </a:gsLst>
+          <a:lin ang="5400000" scaled="0"/>
+        </a:gradFill>
+        <a:gradFill rotWithShape="1">
+          <a:gsLst>
+            <a:gs pos="0">
+              <a:schemeClr val="phClr">
+                <a:satMod val="103000"/>
+                <a:lumMod val="102000"/>
+                <a:tint val="94000"/>
+              </a:schemeClr>
+            </a:gs>
+            <a:gs pos="50000">
+              <a:schemeClr val="phClr">
+                <a:satMod val="110000"/>
+                <a:lumMod val="100000"/>
+                <a:shade val="100000"/>
+              </a:schemeClr>
+            </a:gs>
+            <a:gs pos="100000">
+              <a:schemeClr val="phClr">
+                <a:lumMod val="99000"/>
+                <a:satMod val="120000"/>
+                <a:shade val="78000"/>
+              </a:schemeClr>
+            </a:gs>
+          </a:gsLst>
+          <a:lin ang="5400000" scaled="0"/>
+        </a:gradFill>
+      </a:fillStyleLst>
+      <a:lnStyleLst>
+        <a:ln w="12700" cap="flat" cmpd="sng" algn="ctr">
+          <a:solidFill>
+            <a:schemeClr val="phClr"/>
+          </a:solidFill>
+          <a:prstDash val="solid"/>
+          <a:miter lim="800000"/>
+        </a:ln>
+        <a:ln w="19050" cap="flat" cmpd="sng" algn="ctr">
+          <a:solidFill>
+            <a:schemeClr val="phClr"/>
+          </a:solidFill>
+          <a:prstDash val="solid"/>
+          <a:miter lim="800000"/>
+        </a:ln>
+        <a:ln w="25400" cap="flat" cmpd="sng" algn="ctr">
+          <a:solidFill>
+            <a:schemeClr val="phClr"/>
+          </a:solidFill>
+          <a:prstDash val="solid"/>
+          <a:miter lim="800000"/>
+        </a:ln>
+      </a:lnStyleLst>
+      <a:effectStyleLst>
+        <a:effectStyle>
+          <a:effectLst/>
+        </a:effectStyle>
+        <a:effectStyle>
+          <a:effectLst/>
+        </a:effectStyle>
+        <a:effectStyle>
+          <a:effectLst>
+            <a:outerShdw blurRad="57150" dist="19050" dir="5400000" algn="ctr" rotWithShape="0">
+              <a:srgbClr val="000000">
+                <a:alpha val="63000"/>
+              </a:srgbClr>
+            </a:outerShdw>
+          </a:effectLst>
+        </a:effectStyle>
+      </a:effectStyleLst>
+      <a:bgFillStyleLst>
+        <a:solidFill>
+          <a:schemeClr val="phClr"/>
+        </a:solidFill>
+        <a:solidFill>
+          <a:schemeClr val="phClr">
+            <a:tint val="95000"/>
+            <a:satMod val="170000"/>
+          </a:schemeClr>
+        </a:solidFill>
+        <a:gradFill rotWithShape="1">
+          <a:gsLst>
+            <a:gs pos="0">
+              <a:schemeClr val="phClr">
+                <a:tint val="93000"/>
+                <a:satMod val="150000"/>
+                <a:shade val="98000"/>
+                <a:lumMod val="102000"/>
+              </a:schemeClr>
+            </a:gs>
+            <a:gs pos="50000">
+              <a:schemeClr val="phClr">
+                <a:tint val="98000"/>
+                <a:satMod val="130000"/>
+                <a:shade val="90000"/>
+                <a:lumMod val="103000"/>
+              </a:schemeClr>
+            </a:gs>
+            <a:gs pos="100000">
+              <a:schemeClr val="phClr">
+                <a:shade val="63000"/>
+                <a:satMod val="120000"/>
+              </a:schemeClr>
+            </a:gs>
+          </a:gsLst>
+          <a:lin ang="5400000" scaled="0"/>
+        </a:gradFill>
+      </a:bgFillStyleLst>
+    </a:fmtScheme>
+  </a:themeElements>
+  <a:objectDefaults>
+    <a:lnDef>
+      <a:spPr/>
+      <a:bodyPr/>
+      <a:lstStyle/>
+      <a:style>
+        <a:lnRef idx="2">
+          <a:schemeClr val="accent1"/>
+        </a:lnRef>
+        <a:fillRef idx="0">
+          <a:schemeClr val="accent1"/>
+        </a:fillRef>
+        <a:effectRef idx="1">
+          <a:schemeClr val="accent1"/>
+        </a:effectRef>
+        <a:fontRef idx="minor">
+          <a:schemeClr val="tx1"/>
+        </a:fontRef>
+      </a:style>
+    </a:lnDef>
+  </a:objectDefaults>
+  <a:extraClrSchemeLst/>
+  <a:extLst>
+    <a:ext uri="{05A4C25C-085E-4340-85A3-A5531E510DB2}">
+      <thm15:themeFamily xmlns:thm15="http://schemas.microsoft.com/office/thememl/2012/main" name="Office Theme" id="{2E142A2C-CD16-42D6-873A-C26D2A0506FA}" vid="{1BDDFF52-6CD6-40A5-AB3C-68EB2F1E4D0A}"/>
+    </a:ext>
+  </a:extLst>
+</a:theme>
 </file>